--- a/Good Good Father.pptx
+++ b/Good Good Father.pptx
@@ -270,7 +270,7 @@
           <a:p>
             <a:fld id="{E759A0DE-F190-5444-87AC-4719D5F20D15}" type="datetimeFigureOut">
               <a:rPr lang="en-US" smtClean="0"/>
-              <a:t>12/27/25</a:t>
+              <a:t>5/31/26</a:t>
             </a:fld>
             <a:endParaRPr lang="en-US"/>
           </a:p>
@@ -468,7 +468,7 @@
           <a:p>
             <a:fld id="{E759A0DE-F190-5444-87AC-4719D5F20D15}" type="datetimeFigureOut">
               <a:rPr lang="en-US" smtClean="0"/>
-              <a:t>12/27/25</a:t>
+              <a:t>5/31/26</a:t>
             </a:fld>
             <a:endParaRPr lang="en-US"/>
           </a:p>
@@ -676,7 +676,7 @@
           <a:p>
             <a:fld id="{E759A0DE-F190-5444-87AC-4719D5F20D15}" type="datetimeFigureOut">
               <a:rPr lang="en-US" smtClean="0"/>
-              <a:t>12/27/25</a:t>
+              <a:t>5/31/26</a:t>
             </a:fld>
             <a:endParaRPr lang="en-US"/>
           </a:p>
@@ -874,7 +874,7 @@
           <a:p>
             <a:fld id="{E759A0DE-F190-5444-87AC-4719D5F20D15}" type="datetimeFigureOut">
               <a:rPr lang="en-US" smtClean="0"/>
-              <a:t>12/27/25</a:t>
+              <a:t>5/31/26</a:t>
             </a:fld>
             <a:endParaRPr lang="en-US"/>
           </a:p>
@@ -1149,7 +1149,7 @@
           <a:p>
             <a:fld id="{E759A0DE-F190-5444-87AC-4719D5F20D15}" type="datetimeFigureOut">
               <a:rPr lang="en-US" smtClean="0"/>
-              <a:t>12/27/25</a:t>
+              <a:t>5/31/26</a:t>
             </a:fld>
             <a:endParaRPr lang="en-US"/>
           </a:p>
@@ -1414,7 +1414,7 @@
           <a:p>
             <a:fld id="{E759A0DE-F190-5444-87AC-4719D5F20D15}" type="datetimeFigureOut">
               <a:rPr lang="en-US" smtClean="0"/>
-              <a:t>12/27/25</a:t>
+              <a:t>5/31/26</a:t>
             </a:fld>
             <a:endParaRPr lang="en-US"/>
           </a:p>
@@ -1826,7 +1826,7 @@
           <a:p>
             <a:fld id="{E759A0DE-F190-5444-87AC-4719D5F20D15}" type="datetimeFigureOut">
               <a:rPr lang="en-US" smtClean="0"/>
-              <a:t>12/27/25</a:t>
+              <a:t>5/31/26</a:t>
             </a:fld>
             <a:endParaRPr lang="en-US"/>
           </a:p>
@@ -1967,7 +1967,7 @@
           <a:p>
             <a:fld id="{E759A0DE-F190-5444-87AC-4719D5F20D15}" type="datetimeFigureOut">
               <a:rPr lang="en-US" smtClean="0"/>
-              <a:t>12/27/25</a:t>
+              <a:t>5/31/26</a:t>
             </a:fld>
             <a:endParaRPr lang="en-US"/>
           </a:p>
@@ -2080,7 +2080,7 @@
           <a:p>
             <a:fld id="{E759A0DE-F190-5444-87AC-4719D5F20D15}" type="datetimeFigureOut">
               <a:rPr lang="en-US" smtClean="0"/>
-              <a:t>12/27/25</a:t>
+              <a:t>5/31/26</a:t>
             </a:fld>
             <a:endParaRPr lang="en-US"/>
           </a:p>
@@ -2391,7 +2391,7 @@
           <a:p>
             <a:fld id="{E759A0DE-F190-5444-87AC-4719D5F20D15}" type="datetimeFigureOut">
               <a:rPr lang="en-US" smtClean="0"/>
-              <a:t>12/27/25</a:t>
+              <a:t>5/31/26</a:t>
             </a:fld>
             <a:endParaRPr lang="en-US"/>
           </a:p>
@@ -2679,7 +2679,7 @@
           <a:p>
             <a:fld id="{E759A0DE-F190-5444-87AC-4719D5F20D15}" type="datetimeFigureOut">
               <a:rPr lang="en-US" smtClean="0"/>
-              <a:t>12/27/25</a:t>
+              <a:t>5/31/26</a:t>
             </a:fld>
             <a:endParaRPr lang="en-US"/>
           </a:p>
@@ -2920,7 +2920,7 @@
           <a:p>
             <a:fld id="{E759A0DE-F190-5444-87AC-4719D5F20D15}" type="datetimeFigureOut">
               <a:rPr lang="en-US" smtClean="0"/>
-              <a:t>12/27/25</a:t>
+              <a:t>5/31/26</a:t>
             </a:fld>
             <a:endParaRPr lang="en-US"/>
           </a:p>

--- a/Good Good Father.pptx
+++ b/Good Good Father.pptx
@@ -2,29 +2,29 @@
 <file path=ppt/presentation.xml><?xml version="1.0" encoding="utf-8"?>
 <p:presentation xmlns:a="http://schemas.openxmlformats.org/drawingml/2006/main" xmlns:r="http://schemas.openxmlformats.org/officeDocument/2006/relationships" xmlns:p="http://schemas.openxmlformats.org/presentationml/2006/main" saveSubsetFonts="1" autoCompressPictures="0">
   <p:sldMasterIdLst>
-    <p:sldMasterId id="2147483648" r:id="rId1"/>
+    <p:sldMasterId id="2147483660" r:id="rId1"/>
   </p:sldMasterIdLst>
   <p:sldIdLst>
-    <p:sldId id="256" r:id="rId2"/>
-    <p:sldId id="275" r:id="rId3"/>
+    <p:sldId id="275" r:id="rId2"/>
+    <p:sldId id="286" r:id="rId3"/>
     <p:sldId id="277" r:id="rId4"/>
     <p:sldId id="276" r:id="rId5"/>
     <p:sldId id="279" r:id="rId6"/>
     <p:sldId id="280" r:id="rId7"/>
-    <p:sldId id="281" r:id="rId8"/>
+    <p:sldId id="287" r:id="rId8"/>
     <p:sldId id="278" r:id="rId9"/>
     <p:sldId id="283" r:id="rId10"/>
     <p:sldId id="282" r:id="rId11"/>
     <p:sldId id="284" r:id="rId12"/>
-    <p:sldId id="285" r:id="rId13"/>
+    <p:sldId id="288" r:id="rId13"/>
   </p:sldIdLst>
-  <p:sldSz cx="12192000" cy="6858000"/>
+  <p:sldSz cx="9144000" cy="6858000" type="screen4x3"/>
   <p:notesSz cx="6858000" cy="9144000"/>
   <p:defaultTextStyle>
     <a:defPPr>
       <a:defRPr lang="en-US"/>
     </a:defPPr>
-    <a:lvl1pPr marL="0" algn="l" defTabSz="914400" rtl="0" eaLnBrk="1" latinLnBrk="0" hangingPunct="1">
+    <a:lvl1pPr marL="0" algn="l" defTabSz="457200" rtl="0" eaLnBrk="1" latinLnBrk="0" hangingPunct="1">
       <a:defRPr sz="1800" kern="1200">
         <a:solidFill>
           <a:schemeClr val="tx1"/>
@@ -34,7 +34,7 @@
         <a:cs typeface="+mn-cs"/>
       </a:defRPr>
     </a:lvl1pPr>
-    <a:lvl2pPr marL="457200" algn="l" defTabSz="914400" rtl="0" eaLnBrk="1" latinLnBrk="0" hangingPunct="1">
+    <a:lvl2pPr marL="457200" algn="l" defTabSz="457200" rtl="0" eaLnBrk="1" latinLnBrk="0" hangingPunct="1">
       <a:defRPr sz="1800" kern="1200">
         <a:solidFill>
           <a:schemeClr val="tx1"/>
@@ -44,7 +44,7 @@
         <a:cs typeface="+mn-cs"/>
       </a:defRPr>
     </a:lvl2pPr>
-    <a:lvl3pPr marL="914400" algn="l" defTabSz="914400" rtl="0" eaLnBrk="1" latinLnBrk="0" hangingPunct="1">
+    <a:lvl3pPr marL="914400" algn="l" defTabSz="457200" rtl="0" eaLnBrk="1" latinLnBrk="0" hangingPunct="1">
       <a:defRPr sz="1800" kern="1200">
         <a:solidFill>
           <a:schemeClr val="tx1"/>
@@ -54,7 +54,7 @@
         <a:cs typeface="+mn-cs"/>
       </a:defRPr>
     </a:lvl3pPr>
-    <a:lvl4pPr marL="1371600" algn="l" defTabSz="914400" rtl="0" eaLnBrk="1" latinLnBrk="0" hangingPunct="1">
+    <a:lvl4pPr marL="1371600" algn="l" defTabSz="457200" rtl="0" eaLnBrk="1" latinLnBrk="0" hangingPunct="1">
       <a:defRPr sz="1800" kern="1200">
         <a:solidFill>
           <a:schemeClr val="tx1"/>
@@ -64,7 +64,7 @@
         <a:cs typeface="+mn-cs"/>
       </a:defRPr>
     </a:lvl4pPr>
-    <a:lvl5pPr marL="1828800" algn="l" defTabSz="914400" rtl="0" eaLnBrk="1" latinLnBrk="0" hangingPunct="1">
+    <a:lvl5pPr marL="1828800" algn="l" defTabSz="457200" rtl="0" eaLnBrk="1" latinLnBrk="0" hangingPunct="1">
       <a:defRPr sz="1800" kern="1200">
         <a:solidFill>
           <a:schemeClr val="tx1"/>
@@ -74,7 +74,7 @@
         <a:cs typeface="+mn-cs"/>
       </a:defRPr>
     </a:lvl5pPr>
-    <a:lvl6pPr marL="2286000" algn="l" defTabSz="914400" rtl="0" eaLnBrk="1" latinLnBrk="0" hangingPunct="1">
+    <a:lvl6pPr marL="2286000" algn="l" defTabSz="457200" rtl="0" eaLnBrk="1" latinLnBrk="0" hangingPunct="1">
       <a:defRPr sz="1800" kern="1200">
         <a:solidFill>
           <a:schemeClr val="tx1"/>
@@ -84,7 +84,7 @@
         <a:cs typeface="+mn-cs"/>
       </a:defRPr>
     </a:lvl6pPr>
-    <a:lvl7pPr marL="2743200" algn="l" defTabSz="914400" rtl="0" eaLnBrk="1" latinLnBrk="0" hangingPunct="1">
+    <a:lvl7pPr marL="2743200" algn="l" defTabSz="457200" rtl="0" eaLnBrk="1" latinLnBrk="0" hangingPunct="1">
       <a:defRPr sz="1800" kern="1200">
         <a:solidFill>
           <a:schemeClr val="tx1"/>
@@ -94,7 +94,7 @@
         <a:cs typeface="+mn-cs"/>
       </a:defRPr>
     </a:lvl7pPr>
-    <a:lvl8pPr marL="3200400" algn="l" defTabSz="914400" rtl="0" eaLnBrk="1" latinLnBrk="0" hangingPunct="1">
+    <a:lvl8pPr marL="3200400" algn="l" defTabSz="457200" rtl="0" eaLnBrk="1" latinLnBrk="0" hangingPunct="1">
       <a:defRPr sz="1800" kern="1200">
         <a:solidFill>
           <a:schemeClr val="tx1"/>
@@ -104,7 +104,7 @@
         <a:cs typeface="+mn-cs"/>
       </a:defRPr>
     </a:lvl8pPr>
-    <a:lvl9pPr marL="3657600" algn="l" defTabSz="914400" rtl="0" eaLnBrk="1" latinLnBrk="0" hangingPunct="1">
+    <a:lvl9pPr marL="3657600" algn="l" defTabSz="457200" rtl="0" eaLnBrk="1" latinLnBrk="0" hangingPunct="1">
       <a:defRPr sz="1800" kern="1200">
         <a:solidFill>
           <a:schemeClr val="tx1"/>
@@ -142,13 +142,7 @@
       </p:grpSpPr>
       <p:sp>
         <p:nvSpPr>
-          <p:cNvPr id="2" name="Title 1">
-            <a:extLst>
-              <a:ext uri="{FF2B5EF4-FFF2-40B4-BE49-F238E27FC236}">
-                <a16:creationId xmlns:a16="http://schemas.microsoft.com/office/drawing/2014/main" id="{50FC4881-024B-CA4F-1A53-33C2DC0E7490}"/>
-              </a:ext>
-            </a:extLst>
-          </p:cNvPr>
+          <p:cNvPr id="2" name="Title 1"/>
           <p:cNvSpPr>
             <a:spLocks noGrp="1"/>
           </p:cNvSpPr>
@@ -158,8 +152,8 @@
         </p:nvSpPr>
         <p:spPr>
           <a:xfrm>
-            <a:off x="1524000" y="1122363"/>
-            <a:ext cx="9144000" cy="2387600"/>
+            <a:off x="685800" y="1122363"/>
+            <a:ext cx="7772400" cy="2387600"/>
           </a:xfrm>
         </p:spPr>
         <p:txBody>
@@ -174,18 +168,13 @@
               <a:rPr lang="en-US"/>
               <a:t>Click to edit Master title style</a:t>
             </a:r>
-          </a:p>
-        </p:txBody>
-      </p:sp>
-      <p:sp>
-        <p:nvSpPr>
-          <p:cNvPr id="3" name="Subtitle 2">
-            <a:extLst>
-              <a:ext uri="{FF2B5EF4-FFF2-40B4-BE49-F238E27FC236}">
-                <a16:creationId xmlns:a16="http://schemas.microsoft.com/office/drawing/2014/main" id="{8B0D2959-CEED-C8E4-130C-7C436E2473A7}"/>
-              </a:ext>
-            </a:extLst>
-          </p:cNvPr>
+            <a:endParaRPr lang="en-US" dirty="0"/>
+          </a:p>
+        </p:txBody>
+      </p:sp>
+      <p:sp>
+        <p:nvSpPr>
+          <p:cNvPr id="3" name="Subtitle 2"/>
           <p:cNvSpPr>
             <a:spLocks noGrp="1"/>
           </p:cNvSpPr>
@@ -195,8 +184,8 @@
         </p:nvSpPr>
         <p:spPr>
           <a:xfrm>
-            <a:off x="1524000" y="3602038"/>
-            <a:ext cx="9144000" cy="1655762"/>
+            <a:off x="1143000" y="3602038"/>
+            <a:ext cx="6858000" cy="1655762"/>
           </a:xfrm>
         </p:spPr>
         <p:txBody>
@@ -244,18 +233,13 @@
               <a:rPr lang="en-US"/>
               <a:t>Click to edit Master subtitle style</a:t>
             </a:r>
-          </a:p>
-        </p:txBody>
-      </p:sp>
-      <p:sp>
-        <p:nvSpPr>
-          <p:cNvPr id="4" name="Date Placeholder 3">
-            <a:extLst>
-              <a:ext uri="{FF2B5EF4-FFF2-40B4-BE49-F238E27FC236}">
-                <a16:creationId xmlns:a16="http://schemas.microsoft.com/office/drawing/2014/main" id="{4ABBB692-36FC-D0C6-12D7-33A0E66EA065}"/>
-              </a:ext>
-            </a:extLst>
-          </p:cNvPr>
+            <a:endParaRPr lang="en-US" dirty="0"/>
+          </a:p>
+        </p:txBody>
+      </p:sp>
+      <p:sp>
+        <p:nvSpPr>
+          <p:cNvPr id="4" name="Date Placeholder 3"/>
           <p:cNvSpPr>
             <a:spLocks noGrp="1"/>
           </p:cNvSpPr>
@@ -270,7 +254,7 @@
           <a:p>
             <a:fld id="{E759A0DE-F190-5444-87AC-4719D5F20D15}" type="datetimeFigureOut">
               <a:rPr lang="en-US" smtClean="0"/>
-              <a:t>5/31/26</a:t>
+              <a:t>6/13/26</a:t>
             </a:fld>
             <a:endParaRPr lang="en-US"/>
           </a:p>
@@ -278,13 +262,7 @@
       </p:sp>
       <p:sp>
         <p:nvSpPr>
-          <p:cNvPr id="5" name="Footer Placeholder 4">
-            <a:extLst>
-              <a:ext uri="{FF2B5EF4-FFF2-40B4-BE49-F238E27FC236}">
-                <a16:creationId xmlns:a16="http://schemas.microsoft.com/office/drawing/2014/main" id="{51817876-8CFB-960B-6A57-C7F9FD39D3EC}"/>
-              </a:ext>
-            </a:extLst>
-          </p:cNvPr>
+          <p:cNvPr id="5" name="Footer Placeholder 4"/>
           <p:cNvSpPr>
             <a:spLocks noGrp="1"/>
           </p:cNvSpPr>
@@ -303,13 +281,7 @@
       </p:sp>
       <p:sp>
         <p:nvSpPr>
-          <p:cNvPr id="6" name="Slide Number Placeholder 5">
-            <a:extLst>
-              <a:ext uri="{FF2B5EF4-FFF2-40B4-BE49-F238E27FC236}">
-                <a16:creationId xmlns:a16="http://schemas.microsoft.com/office/drawing/2014/main" id="{DB548E83-1153-3307-5818-CD7F2833A3F5}"/>
-              </a:ext>
-            </a:extLst>
-          </p:cNvPr>
+          <p:cNvPr id="6" name="Slide Number Placeholder 5"/>
           <p:cNvSpPr>
             <a:spLocks noGrp="1"/>
           </p:cNvSpPr>
@@ -333,7 +305,7 @@
     </p:spTree>
     <p:extLst>
       <p:ext uri="{BB962C8B-B14F-4D97-AF65-F5344CB8AC3E}">
-        <p14:creationId xmlns:p14="http://schemas.microsoft.com/office/powerpoint/2010/main" val="2594881872"/>
+        <p14:creationId xmlns:p14="http://schemas.microsoft.com/office/powerpoint/2010/main" val="3543601622"/>
       </p:ext>
     </p:extLst>
   </p:cSld>
@@ -362,13 +334,7 @@
       </p:grpSpPr>
       <p:sp>
         <p:nvSpPr>
-          <p:cNvPr id="2" name="Title 1">
-            <a:extLst>
-              <a:ext uri="{FF2B5EF4-FFF2-40B4-BE49-F238E27FC236}">
-                <a16:creationId xmlns:a16="http://schemas.microsoft.com/office/drawing/2014/main" id="{9015C597-3152-5765-EBC1-B17D9951543D}"/>
-              </a:ext>
-            </a:extLst>
-          </p:cNvPr>
+          <p:cNvPr id="2" name="Title 1"/>
           <p:cNvSpPr>
             <a:spLocks noGrp="1"/>
           </p:cNvSpPr>
@@ -385,18 +351,13 @@
               <a:rPr lang="en-US"/>
               <a:t>Click to edit Master title style</a:t>
             </a:r>
-          </a:p>
-        </p:txBody>
-      </p:sp>
-      <p:sp>
-        <p:nvSpPr>
-          <p:cNvPr id="3" name="Vertical Text Placeholder 2">
-            <a:extLst>
-              <a:ext uri="{FF2B5EF4-FFF2-40B4-BE49-F238E27FC236}">
-                <a16:creationId xmlns:a16="http://schemas.microsoft.com/office/drawing/2014/main" id="{5BA5F73E-18E1-021C-9878-B37DC31E2802}"/>
-              </a:ext>
-            </a:extLst>
-          </p:cNvPr>
+            <a:endParaRPr lang="en-US" dirty="0"/>
+          </a:p>
+        </p:txBody>
+      </p:sp>
+      <p:sp>
+        <p:nvSpPr>
+          <p:cNvPr id="3" name="Vertical Text Placeholder 2"/>
           <p:cNvSpPr>
             <a:spLocks noGrp="1"/>
           </p:cNvSpPr>
@@ -442,18 +403,13 @@
               <a:rPr lang="en-US"/>
               <a:t>Fifth level</a:t>
             </a:r>
-          </a:p>
-        </p:txBody>
-      </p:sp>
-      <p:sp>
-        <p:nvSpPr>
-          <p:cNvPr id="4" name="Date Placeholder 3">
-            <a:extLst>
-              <a:ext uri="{FF2B5EF4-FFF2-40B4-BE49-F238E27FC236}">
-                <a16:creationId xmlns:a16="http://schemas.microsoft.com/office/drawing/2014/main" id="{B683AF53-E0B5-2F63-C15E-4BF621A3186B}"/>
-              </a:ext>
-            </a:extLst>
-          </p:cNvPr>
+            <a:endParaRPr lang="en-US" dirty="0"/>
+          </a:p>
+        </p:txBody>
+      </p:sp>
+      <p:sp>
+        <p:nvSpPr>
+          <p:cNvPr id="4" name="Date Placeholder 3"/>
           <p:cNvSpPr>
             <a:spLocks noGrp="1"/>
           </p:cNvSpPr>
@@ -468,7 +424,7 @@
           <a:p>
             <a:fld id="{E759A0DE-F190-5444-87AC-4719D5F20D15}" type="datetimeFigureOut">
               <a:rPr lang="en-US" smtClean="0"/>
-              <a:t>5/31/26</a:t>
+              <a:t>6/13/26</a:t>
             </a:fld>
             <a:endParaRPr lang="en-US"/>
           </a:p>
@@ -476,13 +432,7 @@
       </p:sp>
       <p:sp>
         <p:nvSpPr>
-          <p:cNvPr id="5" name="Footer Placeholder 4">
-            <a:extLst>
-              <a:ext uri="{FF2B5EF4-FFF2-40B4-BE49-F238E27FC236}">
-                <a16:creationId xmlns:a16="http://schemas.microsoft.com/office/drawing/2014/main" id="{D1CA465D-C46F-7FA4-9154-773B74869505}"/>
-              </a:ext>
-            </a:extLst>
-          </p:cNvPr>
+          <p:cNvPr id="5" name="Footer Placeholder 4"/>
           <p:cNvSpPr>
             <a:spLocks noGrp="1"/>
           </p:cNvSpPr>
@@ -501,13 +451,7 @@
       </p:sp>
       <p:sp>
         <p:nvSpPr>
-          <p:cNvPr id="6" name="Slide Number Placeholder 5">
-            <a:extLst>
-              <a:ext uri="{FF2B5EF4-FFF2-40B4-BE49-F238E27FC236}">
-                <a16:creationId xmlns:a16="http://schemas.microsoft.com/office/drawing/2014/main" id="{BBA3BEE5-DE05-B54F-20CA-E8C336AE957E}"/>
-              </a:ext>
-            </a:extLst>
-          </p:cNvPr>
+          <p:cNvPr id="6" name="Slide Number Placeholder 5"/>
           <p:cNvSpPr>
             <a:spLocks noGrp="1"/>
           </p:cNvSpPr>
@@ -531,7 +475,7 @@
     </p:spTree>
     <p:extLst>
       <p:ext uri="{BB962C8B-B14F-4D97-AF65-F5344CB8AC3E}">
-        <p14:creationId xmlns:p14="http://schemas.microsoft.com/office/powerpoint/2010/main" val="3115587574"/>
+        <p14:creationId xmlns:p14="http://schemas.microsoft.com/office/powerpoint/2010/main" val="266419691"/>
       </p:ext>
     </p:extLst>
   </p:cSld>
@@ -560,13 +504,7 @@
       </p:grpSpPr>
       <p:sp>
         <p:nvSpPr>
-          <p:cNvPr id="2" name="Vertical Title 1">
-            <a:extLst>
-              <a:ext uri="{FF2B5EF4-FFF2-40B4-BE49-F238E27FC236}">
-                <a16:creationId xmlns:a16="http://schemas.microsoft.com/office/drawing/2014/main" id="{42C72931-C193-DCDC-01FD-20CDA0AD4513}"/>
-              </a:ext>
-            </a:extLst>
-          </p:cNvPr>
+          <p:cNvPr id="2" name="Vertical Title 1"/>
           <p:cNvSpPr>
             <a:spLocks noGrp="1"/>
           </p:cNvSpPr>
@@ -576,8 +514,8 @@
         </p:nvSpPr>
         <p:spPr>
           <a:xfrm>
-            <a:off x="8724900" y="365125"/>
-            <a:ext cx="2628900" cy="5811838"/>
+            <a:off x="6543675" y="365125"/>
+            <a:ext cx="1971675" cy="5811838"/>
           </a:xfrm>
         </p:spPr>
         <p:txBody>
@@ -588,18 +526,13 @@
               <a:rPr lang="en-US"/>
               <a:t>Click to edit Master title style</a:t>
             </a:r>
-          </a:p>
-        </p:txBody>
-      </p:sp>
-      <p:sp>
-        <p:nvSpPr>
-          <p:cNvPr id="3" name="Vertical Text Placeholder 2">
-            <a:extLst>
-              <a:ext uri="{FF2B5EF4-FFF2-40B4-BE49-F238E27FC236}">
-                <a16:creationId xmlns:a16="http://schemas.microsoft.com/office/drawing/2014/main" id="{E65B2C1B-4D9D-9A62-13D7-01C6580B781D}"/>
-              </a:ext>
-            </a:extLst>
-          </p:cNvPr>
+            <a:endParaRPr lang="en-US" dirty="0"/>
+          </a:p>
+        </p:txBody>
+      </p:sp>
+      <p:sp>
+        <p:nvSpPr>
+          <p:cNvPr id="3" name="Vertical Text Placeholder 2"/>
           <p:cNvSpPr>
             <a:spLocks noGrp="1"/>
           </p:cNvSpPr>
@@ -609,8 +542,8 @@
         </p:nvSpPr>
         <p:spPr>
           <a:xfrm>
-            <a:off x="838200" y="365125"/>
-            <a:ext cx="7734300" cy="5811838"/>
+            <a:off x="628650" y="365125"/>
+            <a:ext cx="5800725" cy="5811838"/>
           </a:xfrm>
         </p:spPr>
         <p:txBody>
@@ -650,18 +583,13 @@
               <a:rPr lang="en-US"/>
               <a:t>Fifth level</a:t>
             </a:r>
-          </a:p>
-        </p:txBody>
-      </p:sp>
-      <p:sp>
-        <p:nvSpPr>
-          <p:cNvPr id="4" name="Date Placeholder 3">
-            <a:extLst>
-              <a:ext uri="{FF2B5EF4-FFF2-40B4-BE49-F238E27FC236}">
-                <a16:creationId xmlns:a16="http://schemas.microsoft.com/office/drawing/2014/main" id="{57445465-66E1-00A0-A5D2-D034616CC34D}"/>
-              </a:ext>
-            </a:extLst>
-          </p:cNvPr>
+            <a:endParaRPr lang="en-US" dirty="0"/>
+          </a:p>
+        </p:txBody>
+      </p:sp>
+      <p:sp>
+        <p:nvSpPr>
+          <p:cNvPr id="4" name="Date Placeholder 3"/>
           <p:cNvSpPr>
             <a:spLocks noGrp="1"/>
           </p:cNvSpPr>
@@ -676,7 +604,7 @@
           <a:p>
             <a:fld id="{E759A0DE-F190-5444-87AC-4719D5F20D15}" type="datetimeFigureOut">
               <a:rPr lang="en-US" smtClean="0"/>
-              <a:t>5/31/26</a:t>
+              <a:t>6/13/26</a:t>
             </a:fld>
             <a:endParaRPr lang="en-US"/>
           </a:p>
@@ -684,13 +612,7 @@
       </p:sp>
       <p:sp>
         <p:nvSpPr>
-          <p:cNvPr id="5" name="Footer Placeholder 4">
-            <a:extLst>
-              <a:ext uri="{FF2B5EF4-FFF2-40B4-BE49-F238E27FC236}">
-                <a16:creationId xmlns:a16="http://schemas.microsoft.com/office/drawing/2014/main" id="{F253519E-C69A-9396-C73F-1ACB40774508}"/>
-              </a:ext>
-            </a:extLst>
-          </p:cNvPr>
+          <p:cNvPr id="5" name="Footer Placeholder 4"/>
           <p:cNvSpPr>
             <a:spLocks noGrp="1"/>
           </p:cNvSpPr>
@@ -709,13 +631,7 @@
       </p:sp>
       <p:sp>
         <p:nvSpPr>
-          <p:cNvPr id="6" name="Slide Number Placeholder 5">
-            <a:extLst>
-              <a:ext uri="{FF2B5EF4-FFF2-40B4-BE49-F238E27FC236}">
-                <a16:creationId xmlns:a16="http://schemas.microsoft.com/office/drawing/2014/main" id="{CC85BFC6-ABA4-44D2-E110-CE59D7D2AE43}"/>
-              </a:ext>
-            </a:extLst>
-          </p:cNvPr>
+          <p:cNvPr id="6" name="Slide Number Placeholder 5"/>
           <p:cNvSpPr>
             <a:spLocks noGrp="1"/>
           </p:cNvSpPr>
@@ -739,7 +655,7 @@
     </p:spTree>
     <p:extLst>
       <p:ext uri="{BB962C8B-B14F-4D97-AF65-F5344CB8AC3E}">
-        <p14:creationId xmlns:p14="http://schemas.microsoft.com/office/powerpoint/2010/main" val="1588597314"/>
+        <p14:creationId xmlns:p14="http://schemas.microsoft.com/office/powerpoint/2010/main" val="592348085"/>
       </p:ext>
     </p:extLst>
   </p:cSld>
@@ -768,13 +684,7 @@
       </p:grpSpPr>
       <p:sp>
         <p:nvSpPr>
-          <p:cNvPr id="2" name="Title 1">
-            <a:extLst>
-              <a:ext uri="{FF2B5EF4-FFF2-40B4-BE49-F238E27FC236}">
-                <a16:creationId xmlns:a16="http://schemas.microsoft.com/office/drawing/2014/main" id="{A4C6B7EA-B38C-12D1-5730-E271A11FB914}"/>
-              </a:ext>
-            </a:extLst>
-          </p:cNvPr>
+          <p:cNvPr id="2" name="Title 1"/>
           <p:cNvSpPr>
             <a:spLocks noGrp="1"/>
           </p:cNvSpPr>
@@ -791,18 +701,13 @@
               <a:rPr lang="en-US"/>
               <a:t>Click to edit Master title style</a:t>
             </a:r>
-          </a:p>
-        </p:txBody>
-      </p:sp>
-      <p:sp>
-        <p:nvSpPr>
-          <p:cNvPr id="3" name="Content Placeholder 2">
-            <a:extLst>
-              <a:ext uri="{FF2B5EF4-FFF2-40B4-BE49-F238E27FC236}">
-                <a16:creationId xmlns:a16="http://schemas.microsoft.com/office/drawing/2014/main" id="{5D8D1A30-880C-91DF-D6D6-0BE623BC9F03}"/>
-              </a:ext>
-            </a:extLst>
-          </p:cNvPr>
+            <a:endParaRPr lang="en-US" dirty="0"/>
+          </a:p>
+        </p:txBody>
+      </p:sp>
+      <p:sp>
+        <p:nvSpPr>
+          <p:cNvPr id="3" name="Content Placeholder 2"/>
           <p:cNvSpPr>
             <a:spLocks noGrp="1"/>
           </p:cNvSpPr>
@@ -848,18 +753,13 @@
               <a:rPr lang="en-US"/>
               <a:t>Fifth level</a:t>
             </a:r>
-          </a:p>
-        </p:txBody>
-      </p:sp>
-      <p:sp>
-        <p:nvSpPr>
-          <p:cNvPr id="4" name="Date Placeholder 3">
-            <a:extLst>
-              <a:ext uri="{FF2B5EF4-FFF2-40B4-BE49-F238E27FC236}">
-                <a16:creationId xmlns:a16="http://schemas.microsoft.com/office/drawing/2014/main" id="{27753098-E2DC-41B2-9361-756938A8EBFE}"/>
-              </a:ext>
-            </a:extLst>
-          </p:cNvPr>
+            <a:endParaRPr lang="en-US" dirty="0"/>
+          </a:p>
+        </p:txBody>
+      </p:sp>
+      <p:sp>
+        <p:nvSpPr>
+          <p:cNvPr id="4" name="Date Placeholder 3"/>
           <p:cNvSpPr>
             <a:spLocks noGrp="1"/>
           </p:cNvSpPr>
@@ -874,7 +774,7 @@
           <a:p>
             <a:fld id="{E759A0DE-F190-5444-87AC-4719D5F20D15}" type="datetimeFigureOut">
               <a:rPr lang="en-US" smtClean="0"/>
-              <a:t>5/31/26</a:t>
+              <a:t>6/13/26</a:t>
             </a:fld>
             <a:endParaRPr lang="en-US"/>
           </a:p>
@@ -882,13 +782,7 @@
       </p:sp>
       <p:sp>
         <p:nvSpPr>
-          <p:cNvPr id="5" name="Footer Placeholder 4">
-            <a:extLst>
-              <a:ext uri="{FF2B5EF4-FFF2-40B4-BE49-F238E27FC236}">
-                <a16:creationId xmlns:a16="http://schemas.microsoft.com/office/drawing/2014/main" id="{E463E6B5-5EA8-FE6C-FA06-4515DC0C07A4}"/>
-              </a:ext>
-            </a:extLst>
-          </p:cNvPr>
+          <p:cNvPr id="5" name="Footer Placeholder 4"/>
           <p:cNvSpPr>
             <a:spLocks noGrp="1"/>
           </p:cNvSpPr>
@@ -907,13 +801,7 @@
       </p:sp>
       <p:sp>
         <p:nvSpPr>
-          <p:cNvPr id="6" name="Slide Number Placeholder 5">
-            <a:extLst>
-              <a:ext uri="{FF2B5EF4-FFF2-40B4-BE49-F238E27FC236}">
-                <a16:creationId xmlns:a16="http://schemas.microsoft.com/office/drawing/2014/main" id="{196A6D58-9856-3B55-DBEA-1B9A3269B325}"/>
-              </a:ext>
-            </a:extLst>
-          </p:cNvPr>
+          <p:cNvPr id="6" name="Slide Number Placeholder 5"/>
           <p:cNvSpPr>
             <a:spLocks noGrp="1"/>
           </p:cNvSpPr>
@@ -937,7 +825,7 @@
     </p:spTree>
     <p:extLst>
       <p:ext uri="{BB962C8B-B14F-4D97-AF65-F5344CB8AC3E}">
-        <p14:creationId xmlns:p14="http://schemas.microsoft.com/office/powerpoint/2010/main" val="1474312020"/>
+        <p14:creationId xmlns:p14="http://schemas.microsoft.com/office/powerpoint/2010/main" val="3244853427"/>
       </p:ext>
     </p:extLst>
   </p:cSld>
@@ -966,13 +854,7 @@
       </p:grpSpPr>
       <p:sp>
         <p:nvSpPr>
-          <p:cNvPr id="2" name="Title 1">
-            <a:extLst>
-              <a:ext uri="{FF2B5EF4-FFF2-40B4-BE49-F238E27FC236}">
-                <a16:creationId xmlns:a16="http://schemas.microsoft.com/office/drawing/2014/main" id="{F3003BE6-BFB2-0EF8-7BD3-99B4FF56B7C7}"/>
-              </a:ext>
-            </a:extLst>
-          </p:cNvPr>
+          <p:cNvPr id="2" name="Title 1"/>
           <p:cNvSpPr>
             <a:spLocks noGrp="1"/>
           </p:cNvSpPr>
@@ -982,8 +864,8 @@
         </p:nvSpPr>
         <p:spPr>
           <a:xfrm>
-            <a:off x="831850" y="1709738"/>
-            <a:ext cx="10515600" cy="2852737"/>
+            <a:off x="623888" y="1709739"/>
+            <a:ext cx="7886700" cy="2852737"/>
           </a:xfrm>
         </p:spPr>
         <p:txBody>
@@ -998,18 +880,13 @@
               <a:rPr lang="en-US"/>
               <a:t>Click to edit Master title style</a:t>
             </a:r>
-          </a:p>
-        </p:txBody>
-      </p:sp>
-      <p:sp>
-        <p:nvSpPr>
-          <p:cNvPr id="3" name="Text Placeholder 2">
-            <a:extLst>
-              <a:ext uri="{FF2B5EF4-FFF2-40B4-BE49-F238E27FC236}">
-                <a16:creationId xmlns:a16="http://schemas.microsoft.com/office/drawing/2014/main" id="{95E87140-F157-4DFF-CE20-2F5B759FC1E1}"/>
-              </a:ext>
-            </a:extLst>
-          </p:cNvPr>
+            <a:endParaRPr lang="en-US" dirty="0"/>
+          </a:p>
+        </p:txBody>
+      </p:sp>
+      <p:sp>
+        <p:nvSpPr>
+          <p:cNvPr id="3" name="Text Placeholder 2"/>
           <p:cNvSpPr>
             <a:spLocks noGrp="1"/>
           </p:cNvSpPr>
@@ -1019,8 +896,8 @@
         </p:nvSpPr>
         <p:spPr>
           <a:xfrm>
-            <a:off x="831850" y="4589463"/>
-            <a:ext cx="10515600" cy="1500187"/>
+            <a:off x="623888" y="4589464"/>
+            <a:ext cx="7886700" cy="1500187"/>
           </a:xfrm>
         </p:spPr>
         <p:txBody>
@@ -1128,13 +1005,7 @@
       </p:sp>
       <p:sp>
         <p:nvSpPr>
-          <p:cNvPr id="4" name="Date Placeholder 3">
-            <a:extLst>
-              <a:ext uri="{FF2B5EF4-FFF2-40B4-BE49-F238E27FC236}">
-                <a16:creationId xmlns:a16="http://schemas.microsoft.com/office/drawing/2014/main" id="{E119DC89-D1D7-E179-4B62-551014DFE5B3}"/>
-              </a:ext>
-            </a:extLst>
-          </p:cNvPr>
+          <p:cNvPr id="4" name="Date Placeholder 3"/>
           <p:cNvSpPr>
             <a:spLocks noGrp="1"/>
           </p:cNvSpPr>
@@ -1149,7 +1020,7 @@
           <a:p>
             <a:fld id="{E759A0DE-F190-5444-87AC-4719D5F20D15}" type="datetimeFigureOut">
               <a:rPr lang="en-US" smtClean="0"/>
-              <a:t>5/31/26</a:t>
+              <a:t>6/13/26</a:t>
             </a:fld>
             <a:endParaRPr lang="en-US"/>
           </a:p>
@@ -1157,13 +1028,7 @@
       </p:sp>
       <p:sp>
         <p:nvSpPr>
-          <p:cNvPr id="5" name="Footer Placeholder 4">
-            <a:extLst>
-              <a:ext uri="{FF2B5EF4-FFF2-40B4-BE49-F238E27FC236}">
-                <a16:creationId xmlns:a16="http://schemas.microsoft.com/office/drawing/2014/main" id="{0DC033CF-70D2-4EFC-5477-15F7486A8F3C}"/>
-              </a:ext>
-            </a:extLst>
-          </p:cNvPr>
+          <p:cNvPr id="5" name="Footer Placeholder 4"/>
           <p:cNvSpPr>
             <a:spLocks noGrp="1"/>
           </p:cNvSpPr>
@@ -1182,13 +1047,7 @@
       </p:sp>
       <p:sp>
         <p:nvSpPr>
-          <p:cNvPr id="6" name="Slide Number Placeholder 5">
-            <a:extLst>
-              <a:ext uri="{FF2B5EF4-FFF2-40B4-BE49-F238E27FC236}">
-                <a16:creationId xmlns:a16="http://schemas.microsoft.com/office/drawing/2014/main" id="{797ECCF9-ED4E-20EE-67CD-F55D0D853A8C}"/>
-              </a:ext>
-            </a:extLst>
-          </p:cNvPr>
+          <p:cNvPr id="6" name="Slide Number Placeholder 5"/>
           <p:cNvSpPr>
             <a:spLocks noGrp="1"/>
           </p:cNvSpPr>
@@ -1212,7 +1071,7 @@
     </p:spTree>
     <p:extLst>
       <p:ext uri="{BB962C8B-B14F-4D97-AF65-F5344CB8AC3E}">
-        <p14:creationId xmlns:p14="http://schemas.microsoft.com/office/powerpoint/2010/main" val="3736666041"/>
+        <p14:creationId xmlns:p14="http://schemas.microsoft.com/office/powerpoint/2010/main" val="2117553274"/>
       </p:ext>
     </p:extLst>
   </p:cSld>
@@ -1241,13 +1100,7 @@
       </p:grpSpPr>
       <p:sp>
         <p:nvSpPr>
-          <p:cNvPr id="2" name="Title 1">
-            <a:extLst>
-              <a:ext uri="{FF2B5EF4-FFF2-40B4-BE49-F238E27FC236}">
-                <a16:creationId xmlns:a16="http://schemas.microsoft.com/office/drawing/2014/main" id="{74DD7124-6407-E388-DFAC-CEAEF342D72D}"/>
-              </a:ext>
-            </a:extLst>
-          </p:cNvPr>
+          <p:cNvPr id="2" name="Title 1"/>
           <p:cNvSpPr>
             <a:spLocks noGrp="1"/>
           </p:cNvSpPr>
@@ -1264,18 +1117,13 @@
               <a:rPr lang="en-US"/>
               <a:t>Click to edit Master title style</a:t>
             </a:r>
-          </a:p>
-        </p:txBody>
-      </p:sp>
-      <p:sp>
-        <p:nvSpPr>
-          <p:cNvPr id="3" name="Content Placeholder 2">
-            <a:extLst>
-              <a:ext uri="{FF2B5EF4-FFF2-40B4-BE49-F238E27FC236}">
-                <a16:creationId xmlns:a16="http://schemas.microsoft.com/office/drawing/2014/main" id="{0354C6C2-33DA-0102-6360-654F993BD701}"/>
-              </a:ext>
-            </a:extLst>
-          </p:cNvPr>
+            <a:endParaRPr lang="en-US" dirty="0"/>
+          </a:p>
+        </p:txBody>
+      </p:sp>
+      <p:sp>
+        <p:nvSpPr>
+          <p:cNvPr id="3" name="Content Placeholder 2"/>
           <p:cNvSpPr>
             <a:spLocks noGrp="1"/>
           </p:cNvSpPr>
@@ -1285,8 +1133,8 @@
         </p:nvSpPr>
         <p:spPr>
           <a:xfrm>
-            <a:off x="838200" y="1825625"/>
-            <a:ext cx="5181600" cy="4351338"/>
+            <a:off x="628650" y="1825625"/>
+            <a:ext cx="3886200" cy="4351338"/>
           </a:xfrm>
         </p:spPr>
         <p:txBody>
@@ -1326,18 +1174,13 @@
               <a:rPr lang="en-US"/>
               <a:t>Fifth level</a:t>
             </a:r>
-          </a:p>
-        </p:txBody>
-      </p:sp>
-      <p:sp>
-        <p:nvSpPr>
-          <p:cNvPr id="4" name="Content Placeholder 3">
-            <a:extLst>
-              <a:ext uri="{FF2B5EF4-FFF2-40B4-BE49-F238E27FC236}">
-                <a16:creationId xmlns:a16="http://schemas.microsoft.com/office/drawing/2014/main" id="{EE2B2A58-052B-B454-9932-012243039D08}"/>
-              </a:ext>
-            </a:extLst>
-          </p:cNvPr>
+            <a:endParaRPr lang="en-US" dirty="0"/>
+          </a:p>
+        </p:txBody>
+      </p:sp>
+      <p:sp>
+        <p:nvSpPr>
+          <p:cNvPr id="4" name="Content Placeholder 3"/>
           <p:cNvSpPr>
             <a:spLocks noGrp="1"/>
           </p:cNvSpPr>
@@ -1347,8 +1190,8 @@
         </p:nvSpPr>
         <p:spPr>
           <a:xfrm>
-            <a:off x="6172200" y="1825625"/>
-            <a:ext cx="5181600" cy="4351338"/>
+            <a:off x="4629150" y="1825625"/>
+            <a:ext cx="3886200" cy="4351338"/>
           </a:xfrm>
         </p:spPr>
         <p:txBody>
@@ -1388,18 +1231,13 @@
               <a:rPr lang="en-US"/>
               <a:t>Fifth level</a:t>
             </a:r>
-          </a:p>
-        </p:txBody>
-      </p:sp>
-      <p:sp>
-        <p:nvSpPr>
-          <p:cNvPr id="5" name="Date Placeholder 4">
-            <a:extLst>
-              <a:ext uri="{FF2B5EF4-FFF2-40B4-BE49-F238E27FC236}">
-                <a16:creationId xmlns:a16="http://schemas.microsoft.com/office/drawing/2014/main" id="{52B92D04-ECBD-D55F-A459-4C28DF6A8C2E}"/>
-              </a:ext>
-            </a:extLst>
-          </p:cNvPr>
+            <a:endParaRPr lang="en-US" dirty="0"/>
+          </a:p>
+        </p:txBody>
+      </p:sp>
+      <p:sp>
+        <p:nvSpPr>
+          <p:cNvPr id="5" name="Date Placeholder 4"/>
           <p:cNvSpPr>
             <a:spLocks noGrp="1"/>
           </p:cNvSpPr>
@@ -1414,7 +1252,7 @@
           <a:p>
             <a:fld id="{E759A0DE-F190-5444-87AC-4719D5F20D15}" type="datetimeFigureOut">
               <a:rPr lang="en-US" smtClean="0"/>
-              <a:t>5/31/26</a:t>
+              <a:t>6/13/26</a:t>
             </a:fld>
             <a:endParaRPr lang="en-US"/>
           </a:p>
@@ -1422,13 +1260,7 @@
       </p:sp>
       <p:sp>
         <p:nvSpPr>
-          <p:cNvPr id="6" name="Footer Placeholder 5">
-            <a:extLst>
-              <a:ext uri="{FF2B5EF4-FFF2-40B4-BE49-F238E27FC236}">
-                <a16:creationId xmlns:a16="http://schemas.microsoft.com/office/drawing/2014/main" id="{DF69ACAC-11AF-A864-BD18-A4B426A4AA03}"/>
-              </a:ext>
-            </a:extLst>
-          </p:cNvPr>
+          <p:cNvPr id="6" name="Footer Placeholder 5"/>
           <p:cNvSpPr>
             <a:spLocks noGrp="1"/>
           </p:cNvSpPr>
@@ -1447,13 +1279,7 @@
       </p:sp>
       <p:sp>
         <p:nvSpPr>
-          <p:cNvPr id="7" name="Slide Number Placeholder 6">
-            <a:extLst>
-              <a:ext uri="{FF2B5EF4-FFF2-40B4-BE49-F238E27FC236}">
-                <a16:creationId xmlns:a16="http://schemas.microsoft.com/office/drawing/2014/main" id="{3A3C5DAC-E196-CEC3-6A6B-376BB3F37D19}"/>
-              </a:ext>
-            </a:extLst>
-          </p:cNvPr>
+          <p:cNvPr id="7" name="Slide Number Placeholder 6"/>
           <p:cNvSpPr>
             <a:spLocks noGrp="1"/>
           </p:cNvSpPr>
@@ -1477,7 +1303,7 @@
     </p:spTree>
     <p:extLst>
       <p:ext uri="{BB962C8B-B14F-4D97-AF65-F5344CB8AC3E}">
-        <p14:creationId xmlns:p14="http://schemas.microsoft.com/office/powerpoint/2010/main" val="621302458"/>
+        <p14:creationId xmlns:p14="http://schemas.microsoft.com/office/powerpoint/2010/main" val="2261771310"/>
       </p:ext>
     </p:extLst>
   </p:cSld>
@@ -1506,13 +1332,7 @@
       </p:grpSpPr>
       <p:sp>
         <p:nvSpPr>
-          <p:cNvPr id="2" name="Title 1">
-            <a:extLst>
-              <a:ext uri="{FF2B5EF4-FFF2-40B4-BE49-F238E27FC236}">
-                <a16:creationId xmlns:a16="http://schemas.microsoft.com/office/drawing/2014/main" id="{0C632820-190D-235F-CEAA-9558C5413BC1}"/>
-              </a:ext>
-            </a:extLst>
-          </p:cNvPr>
+          <p:cNvPr id="2" name="Title 1"/>
           <p:cNvSpPr>
             <a:spLocks noGrp="1"/>
           </p:cNvSpPr>
@@ -1522,8 +1342,8 @@
         </p:nvSpPr>
         <p:spPr>
           <a:xfrm>
-            <a:off x="839788" y="365125"/>
-            <a:ext cx="10515600" cy="1325563"/>
+            <a:off x="629841" y="365126"/>
+            <a:ext cx="7886700" cy="1325563"/>
           </a:xfrm>
         </p:spPr>
         <p:txBody>
@@ -1534,18 +1354,13 @@
               <a:rPr lang="en-US"/>
               <a:t>Click to edit Master title style</a:t>
             </a:r>
-          </a:p>
-        </p:txBody>
-      </p:sp>
-      <p:sp>
-        <p:nvSpPr>
-          <p:cNvPr id="3" name="Text Placeholder 2">
-            <a:extLst>
-              <a:ext uri="{FF2B5EF4-FFF2-40B4-BE49-F238E27FC236}">
-                <a16:creationId xmlns:a16="http://schemas.microsoft.com/office/drawing/2014/main" id="{16693254-6651-D942-4099-84C9B6A31CF3}"/>
-              </a:ext>
-            </a:extLst>
-          </p:cNvPr>
+            <a:endParaRPr lang="en-US" dirty="0"/>
+          </a:p>
+        </p:txBody>
+      </p:sp>
+      <p:sp>
+        <p:nvSpPr>
+          <p:cNvPr id="3" name="Text Placeholder 2"/>
           <p:cNvSpPr>
             <a:spLocks noGrp="1"/>
           </p:cNvSpPr>
@@ -1555,8 +1370,8 @@
         </p:nvSpPr>
         <p:spPr>
           <a:xfrm>
-            <a:off x="839788" y="1681163"/>
-            <a:ext cx="5157787" cy="823912"/>
+            <a:off x="629842" y="1681163"/>
+            <a:ext cx="3868340" cy="823912"/>
           </a:xfrm>
         </p:spPr>
         <p:txBody>
@@ -1610,13 +1425,7 @@
       </p:sp>
       <p:sp>
         <p:nvSpPr>
-          <p:cNvPr id="4" name="Content Placeholder 3">
-            <a:extLst>
-              <a:ext uri="{FF2B5EF4-FFF2-40B4-BE49-F238E27FC236}">
-                <a16:creationId xmlns:a16="http://schemas.microsoft.com/office/drawing/2014/main" id="{D6D4DAC3-CF47-11DC-83E8-0B1192A4422A}"/>
-              </a:ext>
-            </a:extLst>
-          </p:cNvPr>
+          <p:cNvPr id="4" name="Content Placeholder 3"/>
           <p:cNvSpPr>
             <a:spLocks noGrp="1"/>
           </p:cNvSpPr>
@@ -1626,8 +1435,8 @@
         </p:nvSpPr>
         <p:spPr>
           <a:xfrm>
-            <a:off x="839788" y="2505075"/>
-            <a:ext cx="5157787" cy="3684588"/>
+            <a:off x="629842" y="2505075"/>
+            <a:ext cx="3868340" cy="3684588"/>
           </a:xfrm>
         </p:spPr>
         <p:txBody>
@@ -1667,18 +1476,13 @@
               <a:rPr lang="en-US"/>
               <a:t>Fifth level</a:t>
             </a:r>
-          </a:p>
-        </p:txBody>
-      </p:sp>
-      <p:sp>
-        <p:nvSpPr>
-          <p:cNvPr id="5" name="Text Placeholder 4">
-            <a:extLst>
-              <a:ext uri="{FF2B5EF4-FFF2-40B4-BE49-F238E27FC236}">
-                <a16:creationId xmlns:a16="http://schemas.microsoft.com/office/drawing/2014/main" id="{3C49067B-AD0F-C796-4C8F-C043DB6FD3B3}"/>
-              </a:ext>
-            </a:extLst>
-          </p:cNvPr>
+            <a:endParaRPr lang="en-US" dirty="0"/>
+          </a:p>
+        </p:txBody>
+      </p:sp>
+      <p:sp>
+        <p:nvSpPr>
+          <p:cNvPr id="5" name="Text Placeholder 4"/>
           <p:cNvSpPr>
             <a:spLocks noGrp="1"/>
           </p:cNvSpPr>
@@ -1688,8 +1492,8 @@
         </p:nvSpPr>
         <p:spPr>
           <a:xfrm>
-            <a:off x="6172200" y="1681163"/>
-            <a:ext cx="5183188" cy="823912"/>
+            <a:off x="4629150" y="1681163"/>
+            <a:ext cx="3887391" cy="823912"/>
           </a:xfrm>
         </p:spPr>
         <p:txBody>
@@ -1743,13 +1547,7 @@
       </p:sp>
       <p:sp>
         <p:nvSpPr>
-          <p:cNvPr id="6" name="Content Placeholder 5">
-            <a:extLst>
-              <a:ext uri="{FF2B5EF4-FFF2-40B4-BE49-F238E27FC236}">
-                <a16:creationId xmlns:a16="http://schemas.microsoft.com/office/drawing/2014/main" id="{A4D0695B-675B-E8DD-D931-29E639B3E559}"/>
-              </a:ext>
-            </a:extLst>
-          </p:cNvPr>
+          <p:cNvPr id="6" name="Content Placeholder 5"/>
           <p:cNvSpPr>
             <a:spLocks noGrp="1"/>
           </p:cNvSpPr>
@@ -1759,8 +1557,8 @@
         </p:nvSpPr>
         <p:spPr>
           <a:xfrm>
-            <a:off x="6172200" y="2505075"/>
-            <a:ext cx="5183188" cy="3684588"/>
+            <a:off x="4629150" y="2505075"/>
+            <a:ext cx="3887391" cy="3684588"/>
           </a:xfrm>
         </p:spPr>
         <p:txBody>
@@ -1800,18 +1598,13 @@
               <a:rPr lang="en-US"/>
               <a:t>Fifth level</a:t>
             </a:r>
-          </a:p>
-        </p:txBody>
-      </p:sp>
-      <p:sp>
-        <p:nvSpPr>
-          <p:cNvPr id="7" name="Date Placeholder 6">
-            <a:extLst>
-              <a:ext uri="{FF2B5EF4-FFF2-40B4-BE49-F238E27FC236}">
-                <a16:creationId xmlns:a16="http://schemas.microsoft.com/office/drawing/2014/main" id="{E7F5423C-A80C-353A-6ADA-AD2195CCE83B}"/>
-              </a:ext>
-            </a:extLst>
-          </p:cNvPr>
+            <a:endParaRPr lang="en-US" dirty="0"/>
+          </a:p>
+        </p:txBody>
+      </p:sp>
+      <p:sp>
+        <p:nvSpPr>
+          <p:cNvPr id="7" name="Date Placeholder 6"/>
           <p:cNvSpPr>
             <a:spLocks noGrp="1"/>
           </p:cNvSpPr>
@@ -1826,7 +1619,7 @@
           <a:p>
             <a:fld id="{E759A0DE-F190-5444-87AC-4719D5F20D15}" type="datetimeFigureOut">
               <a:rPr lang="en-US" smtClean="0"/>
-              <a:t>5/31/26</a:t>
+              <a:t>6/13/26</a:t>
             </a:fld>
             <a:endParaRPr lang="en-US"/>
           </a:p>
@@ -1834,13 +1627,7 @@
       </p:sp>
       <p:sp>
         <p:nvSpPr>
-          <p:cNvPr id="8" name="Footer Placeholder 7">
-            <a:extLst>
-              <a:ext uri="{FF2B5EF4-FFF2-40B4-BE49-F238E27FC236}">
-                <a16:creationId xmlns:a16="http://schemas.microsoft.com/office/drawing/2014/main" id="{3154C085-1B7B-06F2-2F97-8BE5AED3D908}"/>
-              </a:ext>
-            </a:extLst>
-          </p:cNvPr>
+          <p:cNvPr id="8" name="Footer Placeholder 7"/>
           <p:cNvSpPr>
             <a:spLocks noGrp="1"/>
           </p:cNvSpPr>
@@ -1859,13 +1646,7 @@
       </p:sp>
       <p:sp>
         <p:nvSpPr>
-          <p:cNvPr id="9" name="Slide Number Placeholder 8">
-            <a:extLst>
-              <a:ext uri="{FF2B5EF4-FFF2-40B4-BE49-F238E27FC236}">
-                <a16:creationId xmlns:a16="http://schemas.microsoft.com/office/drawing/2014/main" id="{A6C6B0A2-57CB-16B8-1E9B-CA6DA6337B35}"/>
-              </a:ext>
-            </a:extLst>
-          </p:cNvPr>
+          <p:cNvPr id="9" name="Slide Number Placeholder 8"/>
           <p:cNvSpPr>
             <a:spLocks noGrp="1"/>
           </p:cNvSpPr>
@@ -1889,7 +1670,7 @@
     </p:spTree>
     <p:extLst>
       <p:ext uri="{BB962C8B-B14F-4D97-AF65-F5344CB8AC3E}">
-        <p14:creationId xmlns:p14="http://schemas.microsoft.com/office/powerpoint/2010/main" val="3902579014"/>
+        <p14:creationId xmlns:p14="http://schemas.microsoft.com/office/powerpoint/2010/main" val="2479480005"/>
       </p:ext>
     </p:extLst>
   </p:cSld>
@@ -1918,13 +1699,7 @@
       </p:grpSpPr>
       <p:sp>
         <p:nvSpPr>
-          <p:cNvPr id="2" name="Title 1">
-            <a:extLst>
-              <a:ext uri="{FF2B5EF4-FFF2-40B4-BE49-F238E27FC236}">
-                <a16:creationId xmlns:a16="http://schemas.microsoft.com/office/drawing/2014/main" id="{42014C2D-A9C6-E4FF-86E0-53926609620A}"/>
-              </a:ext>
-            </a:extLst>
-          </p:cNvPr>
+          <p:cNvPr id="2" name="Title 1"/>
           <p:cNvSpPr>
             <a:spLocks noGrp="1"/>
           </p:cNvSpPr>
@@ -1941,18 +1716,13 @@
               <a:rPr lang="en-US"/>
               <a:t>Click to edit Master title style</a:t>
             </a:r>
-          </a:p>
-        </p:txBody>
-      </p:sp>
-      <p:sp>
-        <p:nvSpPr>
-          <p:cNvPr id="3" name="Date Placeholder 2">
-            <a:extLst>
-              <a:ext uri="{FF2B5EF4-FFF2-40B4-BE49-F238E27FC236}">
-                <a16:creationId xmlns:a16="http://schemas.microsoft.com/office/drawing/2014/main" id="{CAEBDED3-8FA2-E14E-6132-DBF06C0043E9}"/>
-              </a:ext>
-            </a:extLst>
-          </p:cNvPr>
+            <a:endParaRPr lang="en-US" dirty="0"/>
+          </a:p>
+        </p:txBody>
+      </p:sp>
+      <p:sp>
+        <p:nvSpPr>
+          <p:cNvPr id="3" name="Date Placeholder 2"/>
           <p:cNvSpPr>
             <a:spLocks noGrp="1"/>
           </p:cNvSpPr>
@@ -1967,7 +1737,7 @@
           <a:p>
             <a:fld id="{E759A0DE-F190-5444-87AC-4719D5F20D15}" type="datetimeFigureOut">
               <a:rPr lang="en-US" smtClean="0"/>
-              <a:t>5/31/26</a:t>
+              <a:t>6/13/26</a:t>
             </a:fld>
             <a:endParaRPr lang="en-US"/>
           </a:p>
@@ -1975,13 +1745,7 @@
       </p:sp>
       <p:sp>
         <p:nvSpPr>
-          <p:cNvPr id="4" name="Footer Placeholder 3">
-            <a:extLst>
-              <a:ext uri="{FF2B5EF4-FFF2-40B4-BE49-F238E27FC236}">
-                <a16:creationId xmlns:a16="http://schemas.microsoft.com/office/drawing/2014/main" id="{24FF1715-78D0-6155-47B7-64F32ECF5F55}"/>
-              </a:ext>
-            </a:extLst>
-          </p:cNvPr>
+          <p:cNvPr id="4" name="Footer Placeholder 3"/>
           <p:cNvSpPr>
             <a:spLocks noGrp="1"/>
           </p:cNvSpPr>
@@ -2000,13 +1764,7 @@
       </p:sp>
       <p:sp>
         <p:nvSpPr>
-          <p:cNvPr id="5" name="Slide Number Placeholder 4">
-            <a:extLst>
-              <a:ext uri="{FF2B5EF4-FFF2-40B4-BE49-F238E27FC236}">
-                <a16:creationId xmlns:a16="http://schemas.microsoft.com/office/drawing/2014/main" id="{95EE70D1-30EB-D2A6-F6C0-29E5A0681277}"/>
-              </a:ext>
-            </a:extLst>
-          </p:cNvPr>
+          <p:cNvPr id="5" name="Slide Number Placeholder 4"/>
           <p:cNvSpPr>
             <a:spLocks noGrp="1"/>
           </p:cNvSpPr>
@@ -2030,7 +1788,7 @@
     </p:spTree>
     <p:extLst>
       <p:ext uri="{BB962C8B-B14F-4D97-AF65-F5344CB8AC3E}">
-        <p14:creationId xmlns:p14="http://schemas.microsoft.com/office/powerpoint/2010/main" val="2762667879"/>
+        <p14:creationId xmlns:p14="http://schemas.microsoft.com/office/powerpoint/2010/main" val="3417103839"/>
       </p:ext>
     </p:extLst>
   </p:cSld>
@@ -2059,13 +1817,7 @@
       </p:grpSpPr>
       <p:sp>
         <p:nvSpPr>
-          <p:cNvPr id="2" name="Date Placeholder 1">
-            <a:extLst>
-              <a:ext uri="{FF2B5EF4-FFF2-40B4-BE49-F238E27FC236}">
-                <a16:creationId xmlns:a16="http://schemas.microsoft.com/office/drawing/2014/main" id="{9CD2DAB5-6AD5-15BC-026B-B80E34678399}"/>
-              </a:ext>
-            </a:extLst>
-          </p:cNvPr>
+          <p:cNvPr id="2" name="Date Placeholder 1"/>
           <p:cNvSpPr>
             <a:spLocks noGrp="1"/>
           </p:cNvSpPr>
@@ -2080,7 +1832,7 @@
           <a:p>
             <a:fld id="{E759A0DE-F190-5444-87AC-4719D5F20D15}" type="datetimeFigureOut">
               <a:rPr lang="en-US" smtClean="0"/>
-              <a:t>5/31/26</a:t>
+              <a:t>6/13/26</a:t>
             </a:fld>
             <a:endParaRPr lang="en-US"/>
           </a:p>
@@ -2088,13 +1840,7 @@
       </p:sp>
       <p:sp>
         <p:nvSpPr>
-          <p:cNvPr id="3" name="Footer Placeholder 2">
-            <a:extLst>
-              <a:ext uri="{FF2B5EF4-FFF2-40B4-BE49-F238E27FC236}">
-                <a16:creationId xmlns:a16="http://schemas.microsoft.com/office/drawing/2014/main" id="{919D2783-D2E4-47AE-70D6-B4A209E13CBC}"/>
-              </a:ext>
-            </a:extLst>
-          </p:cNvPr>
+          <p:cNvPr id="3" name="Footer Placeholder 2"/>
           <p:cNvSpPr>
             <a:spLocks noGrp="1"/>
           </p:cNvSpPr>
@@ -2113,13 +1859,7 @@
       </p:sp>
       <p:sp>
         <p:nvSpPr>
-          <p:cNvPr id="4" name="Slide Number Placeholder 3">
-            <a:extLst>
-              <a:ext uri="{FF2B5EF4-FFF2-40B4-BE49-F238E27FC236}">
-                <a16:creationId xmlns:a16="http://schemas.microsoft.com/office/drawing/2014/main" id="{009A41F5-9D51-17BE-FB49-C0DC79F1FB33}"/>
-              </a:ext>
-            </a:extLst>
-          </p:cNvPr>
+          <p:cNvPr id="4" name="Slide Number Placeholder 3"/>
           <p:cNvSpPr>
             <a:spLocks noGrp="1"/>
           </p:cNvSpPr>
@@ -2143,7 +1883,7 @@
     </p:spTree>
     <p:extLst>
       <p:ext uri="{BB962C8B-B14F-4D97-AF65-F5344CB8AC3E}">
-        <p14:creationId xmlns:p14="http://schemas.microsoft.com/office/powerpoint/2010/main" val="684399818"/>
+        <p14:creationId xmlns:p14="http://schemas.microsoft.com/office/powerpoint/2010/main" val="1945581722"/>
       </p:ext>
     </p:extLst>
   </p:cSld>
@@ -2172,13 +1912,7 @@
       </p:grpSpPr>
       <p:sp>
         <p:nvSpPr>
-          <p:cNvPr id="2" name="Title 1">
-            <a:extLst>
-              <a:ext uri="{FF2B5EF4-FFF2-40B4-BE49-F238E27FC236}">
-                <a16:creationId xmlns:a16="http://schemas.microsoft.com/office/drawing/2014/main" id="{636535ED-82D6-0936-3EEB-AD9435F5EDC9}"/>
-              </a:ext>
-            </a:extLst>
-          </p:cNvPr>
+          <p:cNvPr id="2" name="Title 1"/>
           <p:cNvSpPr>
             <a:spLocks noGrp="1"/>
           </p:cNvSpPr>
@@ -2188,8 +1922,8 @@
         </p:nvSpPr>
         <p:spPr>
           <a:xfrm>
-            <a:off x="839788" y="457200"/>
-            <a:ext cx="3932237" cy="1600200"/>
+            <a:off x="629841" y="457200"/>
+            <a:ext cx="2949178" cy="1600200"/>
           </a:xfrm>
         </p:spPr>
         <p:txBody>
@@ -2204,18 +1938,13 @@
               <a:rPr lang="en-US"/>
               <a:t>Click to edit Master title style</a:t>
             </a:r>
-          </a:p>
-        </p:txBody>
-      </p:sp>
-      <p:sp>
-        <p:nvSpPr>
-          <p:cNvPr id="3" name="Content Placeholder 2">
-            <a:extLst>
-              <a:ext uri="{FF2B5EF4-FFF2-40B4-BE49-F238E27FC236}">
-                <a16:creationId xmlns:a16="http://schemas.microsoft.com/office/drawing/2014/main" id="{1803B2A4-A7AB-CDB0-D7F1-279536A2702A}"/>
-              </a:ext>
-            </a:extLst>
-          </p:cNvPr>
+            <a:endParaRPr lang="en-US" dirty="0"/>
+          </a:p>
+        </p:txBody>
+      </p:sp>
+      <p:sp>
+        <p:nvSpPr>
+          <p:cNvPr id="3" name="Content Placeholder 2"/>
           <p:cNvSpPr>
             <a:spLocks noGrp="1"/>
           </p:cNvSpPr>
@@ -2225,8 +1954,8 @@
         </p:nvSpPr>
         <p:spPr>
           <a:xfrm>
-            <a:off x="5183188" y="987425"/>
-            <a:ext cx="6172200" cy="4873625"/>
+            <a:off x="3887391" y="987426"/>
+            <a:ext cx="4629150" cy="4873625"/>
           </a:xfrm>
         </p:spPr>
         <p:txBody>
@@ -2294,18 +2023,13 @@
               <a:rPr lang="en-US"/>
               <a:t>Fifth level</a:t>
             </a:r>
-          </a:p>
-        </p:txBody>
-      </p:sp>
-      <p:sp>
-        <p:nvSpPr>
-          <p:cNvPr id="4" name="Text Placeholder 3">
-            <a:extLst>
-              <a:ext uri="{FF2B5EF4-FFF2-40B4-BE49-F238E27FC236}">
-                <a16:creationId xmlns:a16="http://schemas.microsoft.com/office/drawing/2014/main" id="{3329566A-3ACC-2A16-1AAE-6B0281DB7E3C}"/>
-              </a:ext>
-            </a:extLst>
-          </p:cNvPr>
+            <a:endParaRPr lang="en-US" dirty="0"/>
+          </a:p>
+        </p:txBody>
+      </p:sp>
+      <p:sp>
+        <p:nvSpPr>
+          <p:cNvPr id="4" name="Text Placeholder 3"/>
           <p:cNvSpPr>
             <a:spLocks noGrp="1"/>
           </p:cNvSpPr>
@@ -2315,8 +2039,8 @@
         </p:nvSpPr>
         <p:spPr>
           <a:xfrm>
-            <a:off x="839788" y="2057400"/>
-            <a:ext cx="3932237" cy="3811588"/>
+            <a:off x="629841" y="2057400"/>
+            <a:ext cx="2949178" cy="3811588"/>
           </a:xfrm>
         </p:spPr>
         <p:txBody>
@@ -2370,13 +2094,7 @@
       </p:sp>
       <p:sp>
         <p:nvSpPr>
-          <p:cNvPr id="5" name="Date Placeholder 4">
-            <a:extLst>
-              <a:ext uri="{FF2B5EF4-FFF2-40B4-BE49-F238E27FC236}">
-                <a16:creationId xmlns:a16="http://schemas.microsoft.com/office/drawing/2014/main" id="{453518F2-2B74-8F2D-171A-15986F3C5152}"/>
-              </a:ext>
-            </a:extLst>
-          </p:cNvPr>
+          <p:cNvPr id="5" name="Date Placeholder 4"/>
           <p:cNvSpPr>
             <a:spLocks noGrp="1"/>
           </p:cNvSpPr>
@@ -2391,7 +2109,7 @@
           <a:p>
             <a:fld id="{E759A0DE-F190-5444-87AC-4719D5F20D15}" type="datetimeFigureOut">
               <a:rPr lang="en-US" smtClean="0"/>
-              <a:t>5/31/26</a:t>
+              <a:t>6/13/26</a:t>
             </a:fld>
             <a:endParaRPr lang="en-US"/>
           </a:p>
@@ -2399,13 +2117,7 @@
       </p:sp>
       <p:sp>
         <p:nvSpPr>
-          <p:cNvPr id="6" name="Footer Placeholder 5">
-            <a:extLst>
-              <a:ext uri="{FF2B5EF4-FFF2-40B4-BE49-F238E27FC236}">
-                <a16:creationId xmlns:a16="http://schemas.microsoft.com/office/drawing/2014/main" id="{6DF8701B-4899-C3D0-CB2F-6C31378A510F}"/>
-              </a:ext>
-            </a:extLst>
-          </p:cNvPr>
+          <p:cNvPr id="6" name="Footer Placeholder 5"/>
           <p:cNvSpPr>
             <a:spLocks noGrp="1"/>
           </p:cNvSpPr>
@@ -2424,13 +2136,7 @@
       </p:sp>
       <p:sp>
         <p:nvSpPr>
-          <p:cNvPr id="7" name="Slide Number Placeholder 6">
-            <a:extLst>
-              <a:ext uri="{FF2B5EF4-FFF2-40B4-BE49-F238E27FC236}">
-                <a16:creationId xmlns:a16="http://schemas.microsoft.com/office/drawing/2014/main" id="{F3240FD0-A8F8-EFCD-2A69-21AB0FB076F6}"/>
-              </a:ext>
-            </a:extLst>
-          </p:cNvPr>
+          <p:cNvPr id="7" name="Slide Number Placeholder 6"/>
           <p:cNvSpPr>
             <a:spLocks noGrp="1"/>
           </p:cNvSpPr>
@@ -2454,7 +2160,7 @@
     </p:spTree>
     <p:extLst>
       <p:ext uri="{BB962C8B-B14F-4D97-AF65-F5344CB8AC3E}">
-        <p14:creationId xmlns:p14="http://schemas.microsoft.com/office/powerpoint/2010/main" val="2191778824"/>
+        <p14:creationId xmlns:p14="http://schemas.microsoft.com/office/powerpoint/2010/main" val="2803342461"/>
       </p:ext>
     </p:extLst>
   </p:cSld>
@@ -2483,13 +2189,7 @@
       </p:grpSpPr>
       <p:sp>
         <p:nvSpPr>
-          <p:cNvPr id="2" name="Title 1">
-            <a:extLst>
-              <a:ext uri="{FF2B5EF4-FFF2-40B4-BE49-F238E27FC236}">
-                <a16:creationId xmlns:a16="http://schemas.microsoft.com/office/drawing/2014/main" id="{FD43467F-CDAF-BF3C-2E6D-F2EBB52C7E17}"/>
-              </a:ext>
-            </a:extLst>
-          </p:cNvPr>
+          <p:cNvPr id="2" name="Title 1"/>
           <p:cNvSpPr>
             <a:spLocks noGrp="1"/>
           </p:cNvSpPr>
@@ -2499,8 +2199,8 @@
         </p:nvSpPr>
         <p:spPr>
           <a:xfrm>
-            <a:off x="839788" y="457200"/>
-            <a:ext cx="3932237" cy="1600200"/>
+            <a:off x="629841" y="457200"/>
+            <a:ext cx="2949178" cy="1600200"/>
           </a:xfrm>
         </p:spPr>
         <p:txBody>
@@ -2515,20 +2215,15 @@
               <a:rPr lang="en-US"/>
               <a:t>Click to edit Master title style</a:t>
             </a:r>
-          </a:p>
-        </p:txBody>
-      </p:sp>
-      <p:sp>
-        <p:nvSpPr>
-          <p:cNvPr id="3" name="Picture Placeholder 2">
-            <a:extLst>
-              <a:ext uri="{FF2B5EF4-FFF2-40B4-BE49-F238E27FC236}">
-                <a16:creationId xmlns:a16="http://schemas.microsoft.com/office/drawing/2014/main" id="{63D374E6-7653-1FED-90D8-27F8F5A5A555}"/>
-              </a:ext>
-            </a:extLst>
-          </p:cNvPr>
-          <p:cNvSpPr>
-            <a:spLocks noGrp="1"/>
+            <a:endParaRPr lang="en-US" dirty="0"/>
+          </a:p>
+        </p:txBody>
+      </p:sp>
+      <p:sp>
+        <p:nvSpPr>
+          <p:cNvPr id="3" name="Picture Placeholder 2"/>
+          <p:cNvSpPr>
+            <a:spLocks noGrp="1" noChangeAspect="1"/>
           </p:cNvSpPr>
           <p:nvPr>
             <p:ph type="pic" idx="1"/>
@@ -2536,8 +2231,73 @@
         </p:nvSpPr>
         <p:spPr>
           <a:xfrm>
-            <a:off x="5183188" y="987425"/>
-            <a:ext cx="6172200" cy="4873625"/>
+            <a:off x="3887391" y="987426"/>
+            <a:ext cx="4629150" cy="4873625"/>
+          </a:xfrm>
+        </p:spPr>
+        <p:txBody>
+          <a:bodyPr anchor="t"/>
+          <a:lstStyle>
+            <a:lvl1pPr marL="0" indent="0">
+              <a:buNone/>
+              <a:defRPr sz="3200"/>
+            </a:lvl1pPr>
+            <a:lvl2pPr marL="457200" indent="0">
+              <a:buNone/>
+              <a:defRPr sz="2800"/>
+            </a:lvl2pPr>
+            <a:lvl3pPr marL="914400" indent="0">
+              <a:buNone/>
+              <a:defRPr sz="2400"/>
+            </a:lvl3pPr>
+            <a:lvl4pPr marL="1371600" indent="0">
+              <a:buNone/>
+              <a:defRPr sz="2000"/>
+            </a:lvl4pPr>
+            <a:lvl5pPr marL="1828800" indent="0">
+              <a:buNone/>
+              <a:defRPr sz="2000"/>
+            </a:lvl5pPr>
+            <a:lvl6pPr marL="2286000" indent="0">
+              <a:buNone/>
+              <a:defRPr sz="2000"/>
+            </a:lvl6pPr>
+            <a:lvl7pPr marL="2743200" indent="0">
+              <a:buNone/>
+              <a:defRPr sz="2000"/>
+            </a:lvl7pPr>
+            <a:lvl8pPr marL="3200400" indent="0">
+              <a:buNone/>
+              <a:defRPr sz="2000"/>
+            </a:lvl8pPr>
+            <a:lvl9pPr marL="3657600" indent="0">
+              <a:buNone/>
+              <a:defRPr sz="2000"/>
+            </a:lvl9pPr>
+          </a:lstStyle>
+          <a:p>
+            <a:r>
+              <a:rPr lang="en-US"/>
+              <a:t>Click icon to add picture</a:t>
+            </a:r>
+            <a:endParaRPr lang="en-US" dirty="0"/>
+          </a:p>
+        </p:txBody>
+      </p:sp>
+      <p:sp>
+        <p:nvSpPr>
+          <p:cNvPr id="4" name="Text Placeholder 3"/>
+          <p:cNvSpPr>
+            <a:spLocks noGrp="1"/>
+          </p:cNvSpPr>
+          <p:nvPr>
+            <p:ph type="body" sz="half" idx="2"/>
+          </p:nvPr>
+        </p:nvSpPr>
+        <p:spPr>
+          <a:xfrm>
+            <a:off x="629841" y="2057400"/>
+            <a:ext cx="2949178" cy="3811588"/>
           </a:xfrm>
         </p:spPr>
         <p:txBody>
@@ -2545,73 +2305,6 @@
           <a:lstStyle>
             <a:lvl1pPr marL="0" indent="0">
               <a:buNone/>
-              <a:defRPr sz="3200"/>
-            </a:lvl1pPr>
-            <a:lvl2pPr marL="457200" indent="0">
-              <a:buNone/>
-              <a:defRPr sz="2800"/>
-            </a:lvl2pPr>
-            <a:lvl3pPr marL="914400" indent="0">
-              <a:buNone/>
-              <a:defRPr sz="2400"/>
-            </a:lvl3pPr>
-            <a:lvl4pPr marL="1371600" indent="0">
-              <a:buNone/>
-              <a:defRPr sz="2000"/>
-            </a:lvl4pPr>
-            <a:lvl5pPr marL="1828800" indent="0">
-              <a:buNone/>
-              <a:defRPr sz="2000"/>
-            </a:lvl5pPr>
-            <a:lvl6pPr marL="2286000" indent="0">
-              <a:buNone/>
-              <a:defRPr sz="2000"/>
-            </a:lvl6pPr>
-            <a:lvl7pPr marL="2743200" indent="0">
-              <a:buNone/>
-              <a:defRPr sz="2000"/>
-            </a:lvl7pPr>
-            <a:lvl8pPr marL="3200400" indent="0">
-              <a:buNone/>
-              <a:defRPr sz="2000"/>
-            </a:lvl8pPr>
-            <a:lvl9pPr marL="3657600" indent="0">
-              <a:buNone/>
-              <a:defRPr sz="2000"/>
-            </a:lvl9pPr>
-          </a:lstStyle>
-          <a:p>
-            <a:endParaRPr lang="en-US"/>
-          </a:p>
-        </p:txBody>
-      </p:sp>
-      <p:sp>
-        <p:nvSpPr>
-          <p:cNvPr id="4" name="Text Placeholder 3">
-            <a:extLst>
-              <a:ext uri="{FF2B5EF4-FFF2-40B4-BE49-F238E27FC236}">
-                <a16:creationId xmlns:a16="http://schemas.microsoft.com/office/drawing/2014/main" id="{9318631D-B68A-86EE-A551-F2FE300250A2}"/>
-              </a:ext>
-            </a:extLst>
-          </p:cNvPr>
-          <p:cNvSpPr>
-            <a:spLocks noGrp="1"/>
-          </p:cNvSpPr>
-          <p:nvPr>
-            <p:ph type="body" sz="half" idx="2"/>
-          </p:nvPr>
-        </p:nvSpPr>
-        <p:spPr>
-          <a:xfrm>
-            <a:off x="839788" y="2057400"/>
-            <a:ext cx="3932237" cy="3811588"/>
-          </a:xfrm>
-        </p:spPr>
-        <p:txBody>
-          <a:bodyPr/>
-          <a:lstStyle>
-            <a:lvl1pPr marL="0" indent="0">
-              <a:buNone/>
               <a:defRPr sz="1600"/>
             </a:lvl1pPr>
             <a:lvl2pPr marL="457200" indent="0">
@@ -2658,13 +2351,7 @@
       </p:sp>
       <p:sp>
         <p:nvSpPr>
-          <p:cNvPr id="5" name="Date Placeholder 4">
-            <a:extLst>
-              <a:ext uri="{FF2B5EF4-FFF2-40B4-BE49-F238E27FC236}">
-                <a16:creationId xmlns:a16="http://schemas.microsoft.com/office/drawing/2014/main" id="{0CAD5574-CD0C-0EDC-7EA2-BBDDAA07AD36}"/>
-              </a:ext>
-            </a:extLst>
-          </p:cNvPr>
+          <p:cNvPr id="5" name="Date Placeholder 4"/>
           <p:cNvSpPr>
             <a:spLocks noGrp="1"/>
           </p:cNvSpPr>
@@ -2679,7 +2366,7 @@
           <a:p>
             <a:fld id="{E759A0DE-F190-5444-87AC-4719D5F20D15}" type="datetimeFigureOut">
               <a:rPr lang="en-US" smtClean="0"/>
-              <a:t>5/31/26</a:t>
+              <a:t>6/13/26</a:t>
             </a:fld>
             <a:endParaRPr lang="en-US"/>
           </a:p>
@@ -2687,13 +2374,7 @@
       </p:sp>
       <p:sp>
         <p:nvSpPr>
-          <p:cNvPr id="6" name="Footer Placeholder 5">
-            <a:extLst>
-              <a:ext uri="{FF2B5EF4-FFF2-40B4-BE49-F238E27FC236}">
-                <a16:creationId xmlns:a16="http://schemas.microsoft.com/office/drawing/2014/main" id="{C4ADA4F2-15B1-95FF-AFC8-0BCFB4E4E788}"/>
-              </a:ext>
-            </a:extLst>
-          </p:cNvPr>
+          <p:cNvPr id="6" name="Footer Placeholder 5"/>
           <p:cNvSpPr>
             <a:spLocks noGrp="1"/>
           </p:cNvSpPr>
@@ -2712,13 +2393,7 @@
       </p:sp>
       <p:sp>
         <p:nvSpPr>
-          <p:cNvPr id="7" name="Slide Number Placeholder 6">
-            <a:extLst>
-              <a:ext uri="{FF2B5EF4-FFF2-40B4-BE49-F238E27FC236}">
-                <a16:creationId xmlns:a16="http://schemas.microsoft.com/office/drawing/2014/main" id="{5F57356D-53C5-30FE-E0FE-A480BE6A8E8C}"/>
-              </a:ext>
-            </a:extLst>
-          </p:cNvPr>
+          <p:cNvPr id="7" name="Slide Number Placeholder 6"/>
           <p:cNvSpPr>
             <a:spLocks noGrp="1"/>
           </p:cNvSpPr>
@@ -2742,7 +2417,7 @@
     </p:spTree>
     <p:extLst>
       <p:ext uri="{BB962C8B-B14F-4D97-AF65-F5344CB8AC3E}">
-        <p14:creationId xmlns:p14="http://schemas.microsoft.com/office/powerpoint/2010/main" val="3139710704"/>
+        <p14:creationId xmlns:p14="http://schemas.microsoft.com/office/powerpoint/2010/main" val="485309363"/>
       </p:ext>
     </p:extLst>
   </p:cSld>
@@ -2776,13 +2451,7 @@
       </p:grpSpPr>
       <p:sp>
         <p:nvSpPr>
-          <p:cNvPr id="2" name="Title Placeholder 1">
-            <a:extLst>
-              <a:ext uri="{FF2B5EF4-FFF2-40B4-BE49-F238E27FC236}">
-                <a16:creationId xmlns:a16="http://schemas.microsoft.com/office/drawing/2014/main" id="{E707FE23-AD5C-E492-4625-B3FFD7D65D58}"/>
-              </a:ext>
-            </a:extLst>
-          </p:cNvPr>
+          <p:cNvPr id="2" name="Title Placeholder 1"/>
           <p:cNvSpPr>
             <a:spLocks noGrp="1"/>
           </p:cNvSpPr>
@@ -2792,8 +2461,8 @@
         </p:nvSpPr>
         <p:spPr>
           <a:xfrm>
-            <a:off x="838200" y="365125"/>
-            <a:ext cx="10515600" cy="1325563"/>
+            <a:off x="628650" y="365126"/>
+            <a:ext cx="7886700" cy="1325563"/>
           </a:xfrm>
           <a:prstGeom prst="rect">
             <a:avLst/>
@@ -2809,18 +2478,13 @@
               <a:rPr lang="en-US"/>
               <a:t>Click to edit Master title style</a:t>
             </a:r>
-          </a:p>
-        </p:txBody>
-      </p:sp>
-      <p:sp>
-        <p:nvSpPr>
-          <p:cNvPr id="3" name="Text Placeholder 2">
-            <a:extLst>
-              <a:ext uri="{FF2B5EF4-FFF2-40B4-BE49-F238E27FC236}">
-                <a16:creationId xmlns:a16="http://schemas.microsoft.com/office/drawing/2014/main" id="{5935509A-545F-6691-9119-47A073D0143B}"/>
-              </a:ext>
-            </a:extLst>
-          </p:cNvPr>
+            <a:endParaRPr lang="en-US" dirty="0"/>
+          </a:p>
+        </p:txBody>
+      </p:sp>
+      <p:sp>
+        <p:nvSpPr>
+          <p:cNvPr id="3" name="Text Placeholder 2"/>
           <p:cNvSpPr>
             <a:spLocks noGrp="1"/>
           </p:cNvSpPr>
@@ -2830,8 +2494,8 @@
         </p:nvSpPr>
         <p:spPr>
           <a:xfrm>
-            <a:off x="838200" y="1825625"/>
-            <a:ext cx="10515600" cy="4351338"/>
+            <a:off x="628650" y="1825625"/>
+            <a:ext cx="7886700" cy="4351338"/>
           </a:xfrm>
           <a:prstGeom prst="rect">
             <a:avLst/>
@@ -2876,18 +2540,13 @@
               <a:rPr lang="en-US"/>
               <a:t>Fifth level</a:t>
             </a:r>
-          </a:p>
-        </p:txBody>
-      </p:sp>
-      <p:sp>
-        <p:nvSpPr>
-          <p:cNvPr id="4" name="Date Placeholder 3">
-            <a:extLst>
-              <a:ext uri="{FF2B5EF4-FFF2-40B4-BE49-F238E27FC236}">
-                <a16:creationId xmlns:a16="http://schemas.microsoft.com/office/drawing/2014/main" id="{B48FCAAE-1AD5-9CBF-A0F6-52A814732FD0}"/>
-              </a:ext>
-            </a:extLst>
-          </p:cNvPr>
+            <a:endParaRPr lang="en-US" dirty="0"/>
+          </a:p>
+        </p:txBody>
+      </p:sp>
+      <p:sp>
+        <p:nvSpPr>
+          <p:cNvPr id="4" name="Date Placeholder 3"/>
           <p:cNvSpPr>
             <a:spLocks noGrp="1"/>
           </p:cNvSpPr>
@@ -2897,8 +2556,8 @@
         </p:nvSpPr>
         <p:spPr>
           <a:xfrm>
-            <a:off x="838200" y="6356350"/>
-            <a:ext cx="2743200" cy="365125"/>
+            <a:off x="628650" y="6356351"/>
+            <a:ext cx="2057400" cy="365125"/>
           </a:xfrm>
           <a:prstGeom prst="rect">
             <a:avLst/>
@@ -2920,7 +2579,7 @@
           <a:p>
             <a:fld id="{E759A0DE-F190-5444-87AC-4719D5F20D15}" type="datetimeFigureOut">
               <a:rPr lang="en-US" smtClean="0"/>
-              <a:t>5/31/26</a:t>
+              <a:t>6/13/26</a:t>
             </a:fld>
             <a:endParaRPr lang="en-US"/>
           </a:p>
@@ -2928,13 +2587,7 @@
       </p:sp>
       <p:sp>
         <p:nvSpPr>
-          <p:cNvPr id="5" name="Footer Placeholder 4">
-            <a:extLst>
-              <a:ext uri="{FF2B5EF4-FFF2-40B4-BE49-F238E27FC236}">
-                <a16:creationId xmlns:a16="http://schemas.microsoft.com/office/drawing/2014/main" id="{22229717-0F21-BE11-1F19-88106B640856}"/>
-              </a:ext>
-            </a:extLst>
-          </p:cNvPr>
+          <p:cNvPr id="5" name="Footer Placeholder 4"/>
           <p:cNvSpPr>
             <a:spLocks noGrp="1"/>
           </p:cNvSpPr>
@@ -2944,8 +2597,8 @@
         </p:nvSpPr>
         <p:spPr>
           <a:xfrm>
-            <a:off x="4038600" y="6356350"/>
-            <a:ext cx="4114800" cy="365125"/>
+            <a:off x="3028950" y="6356351"/>
+            <a:ext cx="3086100" cy="365125"/>
           </a:xfrm>
           <a:prstGeom prst="rect">
             <a:avLst/>
@@ -2971,13 +2624,7 @@
       </p:sp>
       <p:sp>
         <p:nvSpPr>
-          <p:cNvPr id="6" name="Slide Number Placeholder 5">
-            <a:extLst>
-              <a:ext uri="{FF2B5EF4-FFF2-40B4-BE49-F238E27FC236}">
-                <a16:creationId xmlns:a16="http://schemas.microsoft.com/office/drawing/2014/main" id="{3858A247-FF8D-F68A-7E74-66F74B44BB8E}"/>
-              </a:ext>
-            </a:extLst>
-          </p:cNvPr>
+          <p:cNvPr id="6" name="Slide Number Placeholder 5"/>
           <p:cNvSpPr>
             <a:spLocks noGrp="1"/>
           </p:cNvSpPr>
@@ -2987,8 +2634,8 @@
         </p:nvSpPr>
         <p:spPr>
           <a:xfrm>
-            <a:off x="8610600" y="6356350"/>
-            <a:ext cx="2743200" cy="365125"/>
+            <a:off x="6457950" y="6356351"/>
+            <a:ext cx="2057400" cy="365125"/>
           </a:xfrm>
           <a:prstGeom prst="rect">
             <a:avLst/>
@@ -3019,23 +2666,23 @@
     </p:spTree>
     <p:extLst>
       <p:ext uri="{BB962C8B-B14F-4D97-AF65-F5344CB8AC3E}">
-        <p14:creationId xmlns:p14="http://schemas.microsoft.com/office/powerpoint/2010/main" val="3785378211"/>
+        <p14:creationId xmlns:p14="http://schemas.microsoft.com/office/powerpoint/2010/main" val="1439451274"/>
       </p:ext>
     </p:extLst>
   </p:cSld>
   <p:clrMap bg1="lt1" tx1="dk1" bg2="lt2" tx2="dk2" accent1="accent1" accent2="accent2" accent3="accent3" accent4="accent4" accent5="accent5" accent6="accent6" hlink="hlink" folHlink="folHlink"/>
   <p:sldLayoutIdLst>
-    <p:sldLayoutId id="2147483649" r:id="rId1"/>
-    <p:sldLayoutId id="2147483650" r:id="rId2"/>
-    <p:sldLayoutId id="2147483651" r:id="rId3"/>
-    <p:sldLayoutId id="2147483652" r:id="rId4"/>
-    <p:sldLayoutId id="2147483653" r:id="rId5"/>
-    <p:sldLayoutId id="2147483654" r:id="rId6"/>
-    <p:sldLayoutId id="2147483655" r:id="rId7"/>
-    <p:sldLayoutId id="2147483656" r:id="rId8"/>
-    <p:sldLayoutId id="2147483657" r:id="rId9"/>
-    <p:sldLayoutId id="2147483658" r:id="rId10"/>
-    <p:sldLayoutId id="2147483659" r:id="rId11"/>
+    <p:sldLayoutId id="2147483661" r:id="rId1"/>
+    <p:sldLayoutId id="2147483662" r:id="rId2"/>
+    <p:sldLayoutId id="2147483663" r:id="rId3"/>
+    <p:sldLayoutId id="2147483664" r:id="rId4"/>
+    <p:sldLayoutId id="2147483665" r:id="rId5"/>
+    <p:sldLayoutId id="2147483666" r:id="rId6"/>
+    <p:sldLayoutId id="2147483667" r:id="rId7"/>
+    <p:sldLayoutId id="2147483668" r:id="rId8"/>
+    <p:sldLayoutId id="2147483669" r:id="rId9"/>
+    <p:sldLayoutId id="2147483670" r:id="rId10"/>
+    <p:sldLayoutId id="2147483671" r:id="rId11"/>
   </p:sldLayoutIdLst>
   <p:txStyles>
     <p:titleStyle>
@@ -3326,14 +2973,20 @@
     <p:bg>
       <p:bgPr>
         <a:solidFill>
-          <a:schemeClr val="bg1"/>
+          <a:schemeClr val="tx1"/>
         </a:solidFill>
         <a:effectLst/>
       </p:bgPr>
     </p:bg>
     <p:spTree>
       <p:nvGrpSpPr>
-        <p:cNvPr id="1" name=""/>
+        <p:cNvPr id="1" name="">
+          <a:extLst>
+            <a:ext uri="{FF2B5EF4-FFF2-40B4-BE49-F238E27FC236}">
+              <a16:creationId xmlns:a16="http://schemas.microsoft.com/office/drawing/2014/main" id="{F2F505F0-2C9A-D8AD-DFA4-B739033663F1}"/>
+            </a:ext>
+          </a:extLst>
+        </p:cNvPr>
         <p:cNvGrpSpPr/>
         <p:nvPr/>
       </p:nvGrpSpPr>
@@ -3345,223 +2998,41 @@
           <a:chExt cx="0" cy="0"/>
         </a:xfrm>
       </p:grpSpPr>
-      <p:sp useBgFill="1">
-        <p:nvSpPr>
-          <p:cNvPr id="33" name="Rectangle 32">
+      <p:sp>
+        <p:nvSpPr>
+          <p:cNvPr id="3" name="Subtitle 2">
             <a:extLst>
               <a:ext uri="{FF2B5EF4-FFF2-40B4-BE49-F238E27FC236}">
-                <a16:creationId xmlns:a16="http://schemas.microsoft.com/office/drawing/2014/main" id="{ECC07320-C2CA-4E29-8481-9D9E143C7788}"/>
-              </a:ext>
-              <a:ext uri="{C183D7F6-B498-43B3-948B-1728B52AA6E4}">
-                <adec:decorative xmlns:adec="http://schemas.microsoft.com/office/drawing/2017/decorative" val="1"/>
+                <a16:creationId xmlns:a16="http://schemas.microsoft.com/office/drawing/2014/main" id="{51EF0C30-6484-3BF3-D373-46931D0DFDAD}"/>
               </a:ext>
             </a:extLst>
           </p:cNvPr>
           <p:cNvSpPr>
-            <a:spLocks noGrp="1" noRot="1" noChangeAspect="1" noMove="1" noResize="1" noEditPoints="1" noAdjustHandles="1" noChangeArrowheads="1" noChangeShapeType="1" noTextEdit="1"/>
-          </p:cNvSpPr>
-          <p:nvPr>
-            <p:extLst>
-              <p:ext uri="{386F3935-93C4-4BCD-93E2-E3B085C9AB24}">
-                <p16:designElem xmlns:p16="http://schemas.microsoft.com/office/powerpoint/2015/main" val="1"/>
-              </p:ext>
-            </p:extLst>
+            <a:spLocks noGrp="1"/>
+          </p:cNvSpPr>
+          <p:nvPr>
+            <p:ph type="subTitle" idx="1"/>
           </p:nvPr>
         </p:nvSpPr>
         <p:spPr>
           <a:xfrm>
-            <a:off x="-1" y="0"/>
-            <a:ext cx="12188952" cy="6858000"/>
+            <a:off x="221673" y="180109"/>
+            <a:ext cx="8686800" cy="6442364"/>
           </a:xfrm>
-          <a:prstGeom prst="rect">
-            <a:avLst/>
-          </a:prstGeom>
-          <a:ln>
-            <a:noFill/>
-          </a:ln>
         </p:spPr>
-        <p:style>
-          <a:lnRef idx="2">
-            <a:schemeClr val="accent1">
-              <a:shade val="50000"/>
-            </a:schemeClr>
-          </a:lnRef>
-          <a:fillRef idx="1">
-            <a:schemeClr val="accent1"/>
-          </a:fillRef>
-          <a:effectRef idx="0">
-            <a:schemeClr val="accent1"/>
-          </a:effectRef>
-          <a:fontRef idx="minor">
-            <a:schemeClr val="lt1"/>
-          </a:fontRef>
-        </p:style>
-        <p:txBody>
-          <a:bodyPr rtlCol="0" anchor="ctr"/>
-          <a:lstStyle/>
-          <a:p>
-            <a:pPr algn="ctr"/>
-            <a:endParaRPr lang="en-US"/>
-          </a:p>
-        </p:txBody>
-      </p:sp>
-      <p:pic>
-        <p:nvPicPr>
-          <p:cNvPr id="5" name="Picture 4" descr="A mountain with snow and a sunset&#10;&#10;AI-generated content may be incorrect.">
-            <a:extLst>
-              <a:ext uri="{FF2B5EF4-FFF2-40B4-BE49-F238E27FC236}">
-                <a16:creationId xmlns:a16="http://schemas.microsoft.com/office/drawing/2014/main" id="{6A4D72FC-DF1E-94F8-76BF-4DA02F41FD53}"/>
-              </a:ext>
-            </a:extLst>
-          </p:cNvPr>
-          <p:cNvPicPr>
-            <a:picLocks noChangeAspect="1"/>
-          </p:cNvPicPr>
-          <p:nvPr/>
-        </p:nvPicPr>
-        <p:blipFill>
-          <a:blip r:embed="rId2"/>
-          <a:srcRect l="3824" r="4528"/>
-          <a:stretch>
-            <a:fillRect/>
-          </a:stretch>
-        </p:blipFill>
-        <p:spPr>
-          <a:xfrm>
-            <a:off x="1" y="10"/>
-            <a:ext cx="9669642" cy="6857990"/>
-          </a:xfrm>
-          <a:prstGeom prst="rect">
-            <a:avLst/>
-          </a:prstGeom>
-        </p:spPr>
-      </p:pic>
-      <p:sp>
-        <p:nvSpPr>
-          <p:cNvPr id="34" name="Rectangle 33">
-            <a:extLst>
-              <a:ext uri="{FF2B5EF4-FFF2-40B4-BE49-F238E27FC236}">
-                <a16:creationId xmlns:a16="http://schemas.microsoft.com/office/drawing/2014/main" id="{178FB36B-5BFE-42CA-BC60-1115E0D95EEC}"/>
-              </a:ext>
-              <a:ext uri="{C183D7F6-B498-43B3-948B-1728B52AA6E4}">
-                <adec:decorative xmlns:adec="http://schemas.microsoft.com/office/drawing/2017/decorative" val="1"/>
-              </a:ext>
-            </a:extLst>
-          </p:cNvPr>
-          <p:cNvSpPr>
-            <a:spLocks noGrp="1" noRot="1" noChangeAspect="1" noMove="1" noResize="1" noEditPoints="1" noAdjustHandles="1" noChangeArrowheads="1" noChangeShapeType="1" noTextEdit="1"/>
-          </p:cNvSpPr>
-          <p:nvPr>
-            <p:extLst>
-              <p:ext uri="{386F3935-93C4-4BCD-93E2-E3B085C9AB24}">
-                <p16:designElem xmlns:p16="http://schemas.microsoft.com/office/powerpoint/2015/main" val="1"/>
-              </p:ext>
-            </p:extLst>
-          </p:nvPr>
-        </p:nvSpPr>
-        <p:spPr>
-          <a:xfrm flipH="1">
-            <a:off x="5125019" y="0"/>
-            <a:ext cx="7066978" cy="6858000"/>
-          </a:xfrm>
-          <a:prstGeom prst="rect">
-            <a:avLst/>
-          </a:prstGeom>
-          <a:gradFill>
-            <a:gsLst>
-              <a:gs pos="48000">
-                <a:schemeClr val="bg1"/>
-              </a:gs>
-              <a:gs pos="35000">
-                <a:schemeClr val="bg1">
-                  <a:alpha val="77000"/>
-                </a:schemeClr>
-              </a:gs>
-              <a:gs pos="19000">
-                <a:schemeClr val="bg1">
-                  <a:alpha val="38000"/>
-                </a:schemeClr>
-              </a:gs>
-              <a:gs pos="0">
-                <a:schemeClr val="bg1">
-                  <a:alpha val="0"/>
-                </a:schemeClr>
-              </a:gs>
-              <a:gs pos="100000">
-                <a:schemeClr val="bg1"/>
-              </a:gs>
-            </a:gsLst>
-            <a:lin ang="10800000" scaled="0"/>
-          </a:gradFill>
-          <a:ln>
-            <a:noFill/>
-          </a:ln>
-        </p:spPr>
-        <p:style>
-          <a:lnRef idx="2">
-            <a:schemeClr val="accent1">
-              <a:shade val="50000"/>
-            </a:schemeClr>
-          </a:lnRef>
-          <a:fillRef idx="1">
-            <a:schemeClr val="accent1"/>
-          </a:fillRef>
-          <a:effectRef idx="0">
-            <a:schemeClr val="accent1"/>
-          </a:effectRef>
-          <a:fontRef idx="minor">
-            <a:schemeClr val="lt1"/>
-          </a:fontRef>
-        </p:style>
-        <p:txBody>
-          <a:bodyPr rtlCol="0" anchor="ctr"/>
-          <a:lstStyle/>
-          <a:p>
-            <a:pPr algn="ctr"/>
-            <a:endParaRPr lang="en-US" dirty="0"/>
-          </a:p>
-        </p:txBody>
-      </p:sp>
-      <p:sp>
-        <p:nvSpPr>
-          <p:cNvPr id="3" name="Subtitle 2">
-            <a:extLst>
-              <a:ext uri="{FF2B5EF4-FFF2-40B4-BE49-F238E27FC236}">
-                <a16:creationId xmlns:a16="http://schemas.microsoft.com/office/drawing/2014/main" id="{BDDF4048-2958-B759-F7D1-45755BE99DD7}"/>
-              </a:ext>
-            </a:extLst>
-          </p:cNvPr>
-          <p:cNvSpPr>
-            <a:spLocks noGrp="1"/>
-          </p:cNvSpPr>
-          <p:nvPr>
-            <p:ph type="subTitle" idx="1"/>
-          </p:nvPr>
-        </p:nvSpPr>
-        <p:spPr>
-          <a:xfrm>
-            <a:off x="7935403" y="4629234"/>
-            <a:ext cx="3445766" cy="1485319"/>
-          </a:xfrm>
-          <a:noFill/>
-        </p:spPr>
         <p:txBody>
           <a:bodyPr>
-            <a:normAutofit/>
+            <a:noAutofit/>
           </a:bodyPr>
           <a:lstStyle/>
           <a:p>
             <a:pPr algn="l"/>
-            <a:endParaRPr lang="en-US" dirty="0">
-              <a:latin typeface="Avenir Medium" panose="02000503020000020003" pitchFamily="2" charset="0"/>
-              <a:ea typeface="Bodoni Ornaments" pitchFamily="2" charset="0"/>
-            </a:endParaRPr>
-          </a:p>
-          <a:p>
-            <a:pPr algn="l"/>
-            <a:r>
-              <a:rPr lang="en-US" i="1" dirty="0">
-                <a:latin typeface="Avenir Oblique" panose="02000503020000020003" pitchFamily="2" charset="0"/>
+            <a:r>
+              <a:rPr lang="en-US" sz="8000" dirty="0">
+                <a:solidFill>
+                  <a:schemeClr val="bg1"/>
+                </a:solidFill>
+                <a:latin typeface="Avenir Medium" panose="02000503020000020003" pitchFamily="2" charset="0"/>
                 <a:ea typeface="Bodoni Ornaments" pitchFamily="2" charset="0"/>
               </a:rPr>
               <a:t>Good Good Father</a:t>
@@ -3572,7 +3043,7 @@
     </p:spTree>
     <p:extLst>
       <p:ext uri="{BB962C8B-B14F-4D97-AF65-F5344CB8AC3E}">
-        <p14:creationId xmlns:p14="http://schemas.microsoft.com/office/powerpoint/2010/main" val="1687888858"/>
+        <p14:creationId xmlns:p14="http://schemas.microsoft.com/office/powerpoint/2010/main" val="307111113"/>
       </p:ext>
     </p:extLst>
   </p:cSld>
@@ -3588,7 +3059,7 @@
     <p:bg>
       <p:bgPr>
         <a:solidFill>
-          <a:schemeClr val="accent1"/>
+          <a:schemeClr val="tx1"/>
         </a:solidFill>
         <a:effectLst/>
       </p:bgPr>
@@ -3631,8 +3102,8 @@
         </p:nvSpPr>
         <p:spPr>
           <a:xfrm>
-            <a:off x="682831" y="497702"/>
-            <a:ext cx="10826338" cy="5862596"/>
+            <a:off x="277091" y="235527"/>
+            <a:ext cx="8645236" cy="6317673"/>
           </a:xfrm>
         </p:spPr>
         <p:txBody>
@@ -3641,7 +3112,7 @@
           </a:bodyPr>
           <a:lstStyle/>
           <a:p>
-            <a:endParaRPr lang="en-US" sz="4400" dirty="0">
+            <a:endParaRPr lang="en-US" sz="4000" dirty="0">
               <a:solidFill>
                 <a:schemeClr val="bg1"/>
               </a:solidFill>
@@ -3651,7 +3122,7 @@
           </a:p>
           <a:p>
             <a:r>
-              <a:rPr lang="en-US" sz="4400" dirty="0">
+              <a:rPr lang="en-US" sz="4000" dirty="0">
                 <a:solidFill>
                   <a:schemeClr val="bg1"/>
                 </a:solidFill>
@@ -3663,7 +3134,7 @@
           </a:p>
           <a:p>
             <a:r>
-              <a:rPr lang="en-US" sz="4400" dirty="0">
+              <a:rPr lang="en-US" sz="4000" dirty="0">
                 <a:solidFill>
                   <a:schemeClr val="bg1"/>
                 </a:solidFill>
@@ -3674,7 +3145,7 @@
             </a:r>
           </a:p>
           <a:p>
-            <a:endParaRPr lang="en-US" sz="4400" dirty="0">
+            <a:endParaRPr lang="en-US" sz="4000" dirty="0">
               <a:solidFill>
                 <a:schemeClr val="bg1"/>
               </a:solidFill>
@@ -3684,7 +3155,7 @@
           </a:p>
           <a:p>
             <a:r>
-              <a:rPr lang="en-US" sz="4400" dirty="0">
+              <a:rPr lang="en-US" sz="4000" dirty="0">
                 <a:solidFill>
                   <a:schemeClr val="bg1"/>
                 </a:solidFill>
@@ -3696,7 +3167,7 @@
           </a:p>
           <a:p>
             <a:r>
-              <a:rPr lang="en-US" sz="4400" dirty="0">
+              <a:rPr lang="en-US" sz="4000" dirty="0">
                 <a:solidFill>
                   <a:schemeClr val="bg1"/>
                 </a:solidFill>
@@ -3727,7 +3198,7 @@
     <p:bg>
       <p:bgPr>
         <a:solidFill>
-          <a:schemeClr val="accent1"/>
+          <a:schemeClr val="tx1"/>
         </a:solidFill>
         <a:effectLst/>
       </p:bgPr>
@@ -3770,8 +3241,8 @@
         </p:nvSpPr>
         <p:spPr>
           <a:xfrm>
-            <a:off x="682831" y="497702"/>
-            <a:ext cx="10826338" cy="5862596"/>
+            <a:off x="249382" y="235527"/>
+            <a:ext cx="8617527" cy="6373091"/>
           </a:xfrm>
         </p:spPr>
         <p:txBody>
@@ -3780,7 +3251,7 @@
           </a:bodyPr>
           <a:lstStyle/>
           <a:p>
-            <a:endParaRPr lang="en-US" sz="4400" dirty="0">
+            <a:endParaRPr lang="en-US" sz="4000" dirty="0">
               <a:solidFill>
                 <a:schemeClr val="bg1"/>
               </a:solidFill>
@@ -3790,7 +3261,7 @@
           </a:p>
           <a:p>
             <a:r>
-              <a:rPr lang="en-US" sz="4400" dirty="0">
+              <a:rPr lang="en-US" sz="4000" dirty="0">
                 <a:solidFill>
                   <a:schemeClr val="bg1"/>
                 </a:solidFill>
@@ -3802,7 +3273,7 @@
           </a:p>
           <a:p>
             <a:r>
-              <a:rPr lang="en-US" sz="4400" dirty="0">
+              <a:rPr lang="en-US" sz="4000" dirty="0">
                 <a:solidFill>
                   <a:schemeClr val="bg1"/>
                 </a:solidFill>
@@ -3813,7 +3284,7 @@
             </a:r>
           </a:p>
           <a:p>
-            <a:endParaRPr lang="en-US" sz="4400" dirty="0">
+            <a:endParaRPr lang="en-US" sz="4000" dirty="0">
               <a:solidFill>
                 <a:schemeClr val="bg1"/>
               </a:solidFill>
@@ -3823,7 +3294,7 @@
           </a:p>
           <a:p>
             <a:r>
-              <a:rPr lang="en-US" sz="4400" dirty="0">
+              <a:rPr lang="en-US" sz="4000" dirty="0">
                 <a:solidFill>
                   <a:schemeClr val="bg1"/>
                 </a:solidFill>
@@ -3835,7 +3306,7 @@
           </a:p>
           <a:p>
             <a:r>
-              <a:rPr lang="en-US" sz="4400" dirty="0">
+              <a:rPr lang="en-US" sz="4000" dirty="0">
                 <a:solidFill>
                   <a:schemeClr val="bg1"/>
                 </a:solidFill>
@@ -3846,7 +3317,7 @@
             </a:r>
           </a:p>
           <a:p>
-            <a:endParaRPr lang="en-US" sz="4400" dirty="0">
+            <a:endParaRPr lang="en-US" sz="4000" dirty="0">
               <a:solidFill>
                 <a:schemeClr val="bg1"/>
               </a:solidFill>
@@ -3875,9 +3346,7 @@
     <p:bg>
       <p:bgPr>
         <a:solidFill>
-          <a:schemeClr val="accent5">
-            <a:lumMod val="50000"/>
-          </a:schemeClr>
+          <a:schemeClr val="tx1"/>
         </a:solidFill>
         <a:effectLst/>
       </p:bgPr>
@@ -3887,7 +3356,7 @@
         <p:cNvPr id="1" name="">
           <a:extLst>
             <a:ext uri="{FF2B5EF4-FFF2-40B4-BE49-F238E27FC236}">
-              <a16:creationId xmlns:a16="http://schemas.microsoft.com/office/drawing/2014/main" id="{C3CAF8C5-F4FC-B5B4-923C-EF14680D218A}"/>
+              <a16:creationId xmlns:a16="http://schemas.microsoft.com/office/drawing/2014/main" id="{515062B1-E283-3D9B-76DC-613A54F4BDE5}"/>
             </a:ext>
           </a:extLst>
         </p:cNvPr>
@@ -3907,7 +3376,7 @@
           <p:cNvPr id="3" name="Subtitle 2">
             <a:extLst>
               <a:ext uri="{FF2B5EF4-FFF2-40B4-BE49-F238E27FC236}">
-                <a16:creationId xmlns:a16="http://schemas.microsoft.com/office/drawing/2014/main" id="{6EE2D2CC-ED0F-F941-B292-10D73C7A19E5}"/>
+                <a16:creationId xmlns:a16="http://schemas.microsoft.com/office/drawing/2014/main" id="{E091AEA2-BF87-F4C8-051D-7A15FFA8BA24}"/>
               </a:ext>
             </a:extLst>
           </p:cNvPr>
@@ -3920,8 +3389,8 @@
         </p:nvSpPr>
         <p:spPr>
           <a:xfrm>
-            <a:off x="682831" y="497702"/>
-            <a:ext cx="10826338" cy="5862596"/>
+            <a:off x="290945" y="235527"/>
+            <a:ext cx="8575964" cy="6359237"/>
           </a:xfrm>
         </p:spPr>
         <p:txBody>
@@ -3930,7 +3399,7 @@
           </a:bodyPr>
           <a:lstStyle/>
           <a:p>
-            <a:endParaRPr lang="en-US" sz="4400">
+            <a:endParaRPr lang="en-US" sz="4000" dirty="0">
               <a:solidFill>
                 <a:schemeClr val="bg1"/>
               </a:solidFill>
@@ -3940,49 +3409,19 @@
           </a:p>
           <a:p>
             <a:r>
-              <a:rPr lang="en-US" sz="4400">
+              <a:rPr lang="en-US" sz="4000" dirty="0">
                 <a:solidFill>
                   <a:schemeClr val="bg1"/>
                 </a:solidFill>
                 <a:latin typeface="Avenir Medium" panose="02000503020000020003" pitchFamily="2" charset="0"/>
                 <a:ea typeface="Bodoni Ornaments" pitchFamily="2" charset="0"/>
               </a:rPr>
-              <a:t>You’re </a:t>
-            </a:r>
-            <a:r>
-              <a:rPr lang="en-US" sz="4400" dirty="0">
-                <a:solidFill>
-                  <a:schemeClr val="bg1"/>
-                </a:solidFill>
-                <a:latin typeface="Avenir Medium" panose="02000503020000020003" pitchFamily="2" charset="0"/>
-                <a:ea typeface="Bodoni Ornaments" pitchFamily="2" charset="0"/>
-              </a:rPr>
-              <a:t>a </a:t>
-            </a:r>
-            <a:r>
-              <a:rPr lang="en-US" sz="4400">
-                <a:solidFill>
-                  <a:schemeClr val="bg1"/>
-                </a:solidFill>
-                <a:latin typeface="Avenir Medium" panose="02000503020000020003" pitchFamily="2" charset="0"/>
-                <a:ea typeface="Bodoni Ornaments" pitchFamily="2" charset="0"/>
-              </a:rPr>
-              <a:t>good good </a:t>
-            </a:r>
-            <a:r>
-              <a:rPr lang="en-US" sz="4400" dirty="0">
-                <a:solidFill>
-                  <a:schemeClr val="bg1"/>
-                </a:solidFill>
-                <a:latin typeface="Avenir Medium" panose="02000503020000020003" pitchFamily="2" charset="0"/>
-                <a:ea typeface="Bodoni Ornaments" pitchFamily="2" charset="0"/>
-              </a:rPr>
-              <a:t>Father</a:t>
-            </a:r>
-          </a:p>
-          <a:p>
-            <a:r>
-              <a:rPr lang="en-US" sz="4400" dirty="0">
+              <a:t>You’re a good good Father</a:t>
+            </a:r>
+          </a:p>
+          <a:p>
+            <a:r>
+              <a:rPr lang="en-US" sz="4000" dirty="0">
                 <a:solidFill>
                   <a:schemeClr val="bg1"/>
                 </a:solidFill>
@@ -3993,7 +3432,7 @@
             </a:r>
           </a:p>
           <a:p>
-            <a:endParaRPr lang="en-US" sz="4400" dirty="0">
+            <a:endParaRPr lang="en-US" sz="4000" dirty="0">
               <a:solidFill>
                 <a:schemeClr val="bg1"/>
               </a:solidFill>
@@ -4003,7 +3442,7 @@
           </a:p>
           <a:p>
             <a:r>
-              <a:rPr lang="en-US" sz="4400" dirty="0">
+              <a:rPr lang="en-US" sz="4000" dirty="0">
                 <a:solidFill>
                   <a:schemeClr val="bg1"/>
                 </a:solidFill>
@@ -4015,7 +3454,7 @@
           </a:p>
           <a:p>
             <a:r>
-              <a:rPr lang="en-US" sz="4400" dirty="0">
+              <a:rPr lang="en-US" sz="4000" dirty="0">
                 <a:solidFill>
                   <a:schemeClr val="bg1"/>
                 </a:solidFill>
@@ -4026,7 +3465,7 @@
             </a:r>
           </a:p>
           <a:p>
-            <a:endParaRPr lang="en-US" sz="4400" dirty="0">
+            <a:endParaRPr lang="en-US" sz="4000" dirty="0">
               <a:solidFill>
                 <a:schemeClr val="bg1"/>
               </a:solidFill>
@@ -4036,10 +3475,49 @@
           </a:p>
         </p:txBody>
       </p:sp>
+      <p:sp>
+        <p:nvSpPr>
+          <p:cNvPr id="2" name="TextBox 1">
+            <a:extLst>
+              <a:ext uri="{FF2B5EF4-FFF2-40B4-BE49-F238E27FC236}">
+                <a16:creationId xmlns:a16="http://schemas.microsoft.com/office/drawing/2014/main" id="{416213ED-94A8-BC54-1DEE-F74ECC714D7D}"/>
+              </a:ext>
+            </a:extLst>
+          </p:cNvPr>
+          <p:cNvSpPr txBox="1"/>
+          <p:nvPr/>
+        </p:nvSpPr>
+        <p:spPr>
+          <a:xfrm>
+            <a:off x="7390614" y="6488668"/>
+            <a:ext cx="1753386" cy="369332"/>
+          </a:xfrm>
+          <a:prstGeom prst="rect">
+            <a:avLst/>
+          </a:prstGeom>
+          <a:noFill/>
+        </p:spPr>
+        <p:txBody>
+          <a:bodyPr wrap="square" rtlCol="0">
+            <a:spAutoFit/>
+          </a:bodyPr>
+          <a:lstStyle/>
+          <a:p>
+            <a:r>
+              <a:rPr lang="en-US" dirty="0">
+                <a:solidFill>
+                  <a:schemeClr val="bg1"/>
+                </a:solidFill>
+              </a:rPr>
+              <a:t>CCLI#7102397</a:t>
+            </a:r>
+          </a:p>
+        </p:txBody>
+      </p:sp>
     </p:spTree>
     <p:extLst>
       <p:ext uri="{BB962C8B-B14F-4D97-AF65-F5344CB8AC3E}">
-        <p14:creationId xmlns:p14="http://schemas.microsoft.com/office/powerpoint/2010/main" val="1028924531"/>
+        <p14:creationId xmlns:p14="http://schemas.microsoft.com/office/powerpoint/2010/main" val="3596332603"/>
       </p:ext>
     </p:extLst>
   </p:cSld>
@@ -4055,7 +3533,7 @@
     <p:bg>
       <p:bgPr>
         <a:solidFill>
-          <a:schemeClr val="accent1"/>
+          <a:schemeClr val="tx1"/>
         </a:solidFill>
         <a:effectLst/>
       </p:bgPr>
@@ -4065,7 +3543,7 @@
         <p:cNvPr id="1" name="">
           <a:extLst>
             <a:ext uri="{FF2B5EF4-FFF2-40B4-BE49-F238E27FC236}">
-              <a16:creationId xmlns:a16="http://schemas.microsoft.com/office/drawing/2014/main" id="{F2F505F0-2C9A-D8AD-DFA4-B739033663F1}"/>
+              <a16:creationId xmlns:a16="http://schemas.microsoft.com/office/drawing/2014/main" id="{FEAD9A4C-2176-3F5D-F7D9-8F6FDC828366}"/>
             </a:ext>
           </a:extLst>
         </p:cNvPr>
@@ -4085,7 +3563,7 @@
           <p:cNvPr id="3" name="Subtitle 2">
             <a:extLst>
               <a:ext uri="{FF2B5EF4-FFF2-40B4-BE49-F238E27FC236}">
-                <a16:creationId xmlns:a16="http://schemas.microsoft.com/office/drawing/2014/main" id="{51EF0C30-6484-3BF3-D373-46931D0DFDAD}"/>
+                <a16:creationId xmlns:a16="http://schemas.microsoft.com/office/drawing/2014/main" id="{2016ACDE-47DE-6CBD-8468-A74C1814F781}"/>
               </a:ext>
             </a:extLst>
           </p:cNvPr>
@@ -4098,8 +3576,8 @@
         </p:nvSpPr>
         <p:spPr>
           <a:xfrm>
-            <a:off x="682831" y="497702"/>
-            <a:ext cx="10826338" cy="5862596"/>
+            <a:off x="332508" y="221673"/>
+            <a:ext cx="8617527" cy="6317672"/>
           </a:xfrm>
         </p:spPr>
         <p:txBody>
@@ -4108,7 +3586,7 @@
           </a:bodyPr>
           <a:lstStyle/>
           <a:p>
-            <a:endParaRPr lang="en-US" sz="4400" dirty="0">
+            <a:endParaRPr lang="en-US" sz="4000" dirty="0">
               <a:solidFill>
                 <a:schemeClr val="bg1"/>
               </a:solidFill>
@@ -4118,7 +3596,7 @@
           </a:p>
           <a:p>
             <a:r>
-              <a:rPr lang="en-US" sz="4400" dirty="0">
+              <a:rPr lang="en-US" sz="4000" dirty="0">
                 <a:solidFill>
                   <a:schemeClr val="bg1"/>
                 </a:solidFill>
@@ -4130,7 +3608,7 @@
           </a:p>
           <a:p>
             <a:r>
-              <a:rPr lang="en-US" sz="4400" dirty="0">
+              <a:rPr lang="en-US" sz="4000" dirty="0">
                 <a:solidFill>
                   <a:schemeClr val="bg1"/>
                 </a:solidFill>
@@ -4141,7 +3619,7 @@
             </a:r>
           </a:p>
           <a:p>
-            <a:endParaRPr lang="en-US" sz="4400" dirty="0">
+            <a:endParaRPr lang="en-US" sz="4000" dirty="0">
               <a:solidFill>
                 <a:schemeClr val="bg1"/>
               </a:solidFill>
@@ -4151,7 +3629,7 @@
           </a:p>
           <a:p>
             <a:r>
-              <a:rPr lang="en-US" sz="4400" dirty="0">
+              <a:rPr lang="en-US" sz="4000" dirty="0">
                 <a:solidFill>
                   <a:schemeClr val="bg1"/>
                 </a:solidFill>
@@ -4163,7 +3641,7 @@
           </a:p>
           <a:p>
             <a:r>
-              <a:rPr lang="en-US" sz="4400" dirty="0">
+              <a:rPr lang="en-US" sz="4000" dirty="0">
                 <a:solidFill>
                   <a:schemeClr val="bg1"/>
                 </a:solidFill>
@@ -4178,7 +3656,7 @@
     </p:spTree>
     <p:extLst>
       <p:ext uri="{BB962C8B-B14F-4D97-AF65-F5344CB8AC3E}">
-        <p14:creationId xmlns:p14="http://schemas.microsoft.com/office/powerpoint/2010/main" val="307111113"/>
+        <p14:creationId xmlns:p14="http://schemas.microsoft.com/office/powerpoint/2010/main" val="3500077559"/>
       </p:ext>
     </p:extLst>
   </p:cSld>
@@ -4194,7 +3672,7 @@
     <p:bg>
       <p:bgPr>
         <a:solidFill>
-          <a:schemeClr val="accent1"/>
+          <a:schemeClr val="tx1"/>
         </a:solidFill>
         <a:effectLst/>
       </p:bgPr>
@@ -4237,8 +3715,8 @@
         </p:nvSpPr>
         <p:spPr>
           <a:xfrm>
-            <a:off x="682831" y="497702"/>
-            <a:ext cx="10826338" cy="5862596"/>
+            <a:off x="249382" y="332509"/>
+            <a:ext cx="8506691" cy="6179127"/>
           </a:xfrm>
         </p:spPr>
         <p:txBody>
@@ -4247,43 +3725,7 @@
           </a:bodyPr>
           <a:lstStyle/>
           <a:p>
-            <a:r>
-              <a:rPr lang="en-US" sz="4400" dirty="0">
-                <a:solidFill>
-                  <a:schemeClr val="bg1"/>
-                </a:solidFill>
-                <a:latin typeface="Avenir Medium" panose="02000503020000020003" pitchFamily="2" charset="0"/>
-                <a:ea typeface="Bodoni Ornaments" pitchFamily="2" charset="0"/>
-              </a:rPr>
-              <a:t>But I’ve heard</a:t>
-            </a:r>
-          </a:p>
-          <a:p>
-            <a:r>
-              <a:rPr lang="en-US" sz="4400" dirty="0">
-                <a:solidFill>
-                  <a:schemeClr val="bg1"/>
-                </a:solidFill>
-                <a:latin typeface="Avenir Medium" panose="02000503020000020003" pitchFamily="2" charset="0"/>
-                <a:ea typeface="Bodoni Ornaments" pitchFamily="2" charset="0"/>
-              </a:rPr>
-              <a:t>The tender whisper of love</a:t>
-            </a:r>
-          </a:p>
-          <a:p>
-            <a:r>
-              <a:rPr lang="en-US" sz="4400" dirty="0">
-                <a:solidFill>
-                  <a:schemeClr val="bg1"/>
-                </a:solidFill>
-                <a:latin typeface="Avenir Medium" panose="02000503020000020003" pitchFamily="2" charset="0"/>
-                <a:ea typeface="Bodoni Ornaments" pitchFamily="2" charset="0"/>
-              </a:rPr>
-              <a:t>In the dead of night</a:t>
-            </a:r>
-          </a:p>
-          <a:p>
-            <a:endParaRPr lang="en-US" sz="4400" dirty="0">
+            <a:endParaRPr lang="en-US" sz="4000" dirty="0">
               <a:solidFill>
                 <a:schemeClr val="bg1"/>
               </a:solidFill>
@@ -4293,7 +3735,52 @@
           </a:p>
           <a:p>
             <a:r>
-              <a:rPr lang="en-US" sz="4400" dirty="0">
+              <a:rPr lang="en-US" sz="4000" dirty="0">
+                <a:solidFill>
+                  <a:schemeClr val="bg1"/>
+                </a:solidFill>
+                <a:latin typeface="Avenir Medium" panose="02000503020000020003" pitchFamily="2" charset="0"/>
+                <a:ea typeface="Bodoni Ornaments" pitchFamily="2" charset="0"/>
+              </a:rPr>
+              <a:t>But I’ve heard</a:t>
+            </a:r>
+          </a:p>
+          <a:p>
+            <a:r>
+              <a:rPr lang="en-US" sz="4000" dirty="0">
+                <a:solidFill>
+                  <a:schemeClr val="bg1"/>
+                </a:solidFill>
+                <a:latin typeface="Avenir Medium" panose="02000503020000020003" pitchFamily="2" charset="0"/>
+                <a:ea typeface="Bodoni Ornaments" pitchFamily="2" charset="0"/>
+              </a:rPr>
+              <a:t>The tender whisper of love</a:t>
+            </a:r>
+          </a:p>
+          <a:p>
+            <a:r>
+              <a:rPr lang="en-US" sz="4000" dirty="0">
+                <a:solidFill>
+                  <a:schemeClr val="bg1"/>
+                </a:solidFill>
+                <a:latin typeface="Avenir Medium" panose="02000503020000020003" pitchFamily="2" charset="0"/>
+                <a:ea typeface="Bodoni Ornaments" pitchFamily="2" charset="0"/>
+              </a:rPr>
+              <a:t>In the dead of night</a:t>
+            </a:r>
+          </a:p>
+          <a:p>
+            <a:endParaRPr lang="en-US" sz="4000" dirty="0">
+              <a:solidFill>
+                <a:schemeClr val="bg1"/>
+              </a:solidFill>
+              <a:latin typeface="Avenir Medium" panose="02000503020000020003" pitchFamily="2" charset="0"/>
+              <a:ea typeface="Bodoni Ornaments" pitchFamily="2" charset="0"/>
+            </a:endParaRPr>
+          </a:p>
+          <a:p>
+            <a:r>
+              <a:rPr lang="en-US" sz="4000" dirty="0">
                 <a:solidFill>
                   <a:schemeClr val="bg1"/>
                 </a:solidFill>
@@ -4305,7 +3792,7 @@
           </a:p>
           <a:p>
             <a:r>
-              <a:rPr lang="en-US" sz="4400" dirty="0">
+              <a:rPr lang="en-US" sz="4000" dirty="0">
                 <a:solidFill>
                   <a:schemeClr val="bg1"/>
                 </a:solidFill>
@@ -4317,7 +3804,7 @@
           </a:p>
           <a:p>
             <a:r>
-              <a:rPr lang="en-US" sz="4400" dirty="0">
+              <a:rPr lang="en-US" sz="4000" dirty="0">
                 <a:solidFill>
                   <a:schemeClr val="bg1"/>
                 </a:solidFill>
@@ -4348,9 +3835,7 @@
     <p:bg>
       <p:bgPr>
         <a:solidFill>
-          <a:schemeClr val="accent5">
-            <a:lumMod val="50000"/>
-          </a:schemeClr>
+          <a:schemeClr val="tx1"/>
         </a:solidFill>
         <a:effectLst/>
       </p:bgPr>
@@ -4393,8 +3878,8 @@
         </p:nvSpPr>
         <p:spPr>
           <a:xfrm>
-            <a:off x="682831" y="497702"/>
-            <a:ext cx="10826338" cy="5862596"/>
+            <a:off x="290945" y="235527"/>
+            <a:ext cx="8575964" cy="6359237"/>
           </a:xfrm>
         </p:spPr>
         <p:txBody>
@@ -4403,7 +3888,7 @@
           </a:bodyPr>
           <a:lstStyle/>
           <a:p>
-            <a:endParaRPr lang="en-US" sz="4400" dirty="0">
+            <a:endParaRPr lang="en-US" sz="4000" dirty="0">
               <a:solidFill>
                 <a:schemeClr val="bg1"/>
               </a:solidFill>
@@ -4413,7 +3898,7 @@
           </a:p>
           <a:p>
             <a:r>
-              <a:rPr lang="en-US" sz="4400" dirty="0">
+              <a:rPr lang="en-US" sz="4000" dirty="0">
                 <a:solidFill>
                   <a:schemeClr val="bg1"/>
                 </a:solidFill>
@@ -4425,7 +3910,7 @@
           </a:p>
           <a:p>
             <a:r>
-              <a:rPr lang="en-US" sz="4400" dirty="0">
+              <a:rPr lang="en-US" sz="4000" dirty="0">
                 <a:solidFill>
                   <a:schemeClr val="bg1"/>
                 </a:solidFill>
@@ -4436,7 +3921,7 @@
             </a:r>
           </a:p>
           <a:p>
-            <a:endParaRPr lang="en-US" sz="4400" dirty="0">
+            <a:endParaRPr lang="en-US" sz="4000" dirty="0">
               <a:solidFill>
                 <a:schemeClr val="bg1"/>
               </a:solidFill>
@@ -4446,7 +3931,7 @@
           </a:p>
           <a:p>
             <a:r>
-              <a:rPr lang="en-US" sz="4400" dirty="0">
+              <a:rPr lang="en-US" sz="4000" dirty="0">
                 <a:solidFill>
                   <a:schemeClr val="bg1"/>
                 </a:solidFill>
@@ -4458,7 +3943,7 @@
           </a:p>
           <a:p>
             <a:r>
-              <a:rPr lang="en-US" sz="4400" dirty="0">
+              <a:rPr lang="en-US" sz="4000" dirty="0">
                 <a:solidFill>
                   <a:schemeClr val="bg1"/>
                 </a:solidFill>
@@ -4469,7 +3954,7 @@
             </a:r>
           </a:p>
           <a:p>
-            <a:endParaRPr lang="en-US" sz="4400" dirty="0">
+            <a:endParaRPr lang="en-US" sz="4000" dirty="0">
               <a:solidFill>
                 <a:schemeClr val="bg1"/>
               </a:solidFill>
@@ -4498,7 +3983,7 @@
     <p:bg>
       <p:bgPr>
         <a:solidFill>
-          <a:schemeClr val="accent1"/>
+          <a:schemeClr val="tx1"/>
         </a:solidFill>
         <a:effectLst/>
       </p:bgPr>
@@ -4541,8 +4026,8 @@
         </p:nvSpPr>
         <p:spPr>
           <a:xfrm>
-            <a:off x="682831" y="497702"/>
-            <a:ext cx="10826338" cy="5862596"/>
+            <a:off x="332508" y="277091"/>
+            <a:ext cx="8506691" cy="6317673"/>
           </a:xfrm>
         </p:spPr>
         <p:txBody>
@@ -4551,31 +4036,7 @@
           </a:bodyPr>
           <a:lstStyle/>
           <a:p>
-            <a:r>
-              <a:rPr lang="en-US" sz="4400" dirty="0">
-                <a:solidFill>
-                  <a:schemeClr val="bg1"/>
-                </a:solidFill>
-                <a:latin typeface="Avenir Medium" panose="02000503020000020003" pitchFamily="2" charset="0"/>
-                <a:ea typeface="Bodoni Ornaments" pitchFamily="2" charset="0"/>
-              </a:rPr>
-              <a:t>Oh, and I’ve seen</a:t>
-            </a:r>
-          </a:p>
-          <a:p>
-            <a:r>
-              <a:rPr lang="en-US" sz="4400" dirty="0">
-                <a:solidFill>
-                  <a:schemeClr val="bg1"/>
-                </a:solidFill>
-                <a:latin typeface="Avenir Medium" panose="02000503020000020003" pitchFamily="2" charset="0"/>
-                <a:ea typeface="Bodoni Ornaments" pitchFamily="2" charset="0"/>
-              </a:rPr>
-              <a:t>Many searching</a:t>
-            </a:r>
-          </a:p>
-          <a:p>
-            <a:endParaRPr lang="en-US" sz="4400" dirty="0">
+            <a:endParaRPr lang="en-US" sz="4000" dirty="0">
               <a:solidFill>
                 <a:schemeClr val="bg1"/>
               </a:solidFill>
@@ -4584,8 +4045,50 @@
             </a:endParaRPr>
           </a:p>
           <a:p>
-            <a:r>
-              <a:rPr lang="en-US" sz="4400" dirty="0">
+            <a:endParaRPr lang="en-US" sz="4000" dirty="0">
+              <a:solidFill>
+                <a:schemeClr val="bg1"/>
+              </a:solidFill>
+              <a:latin typeface="Avenir Medium" panose="02000503020000020003" pitchFamily="2" charset="0"/>
+              <a:ea typeface="Bodoni Ornaments" pitchFamily="2" charset="0"/>
+            </a:endParaRPr>
+          </a:p>
+          <a:p>
+            <a:r>
+              <a:rPr lang="en-US" sz="4000" dirty="0">
+                <a:solidFill>
+                  <a:schemeClr val="bg1"/>
+                </a:solidFill>
+                <a:latin typeface="Avenir Medium" panose="02000503020000020003" pitchFamily="2" charset="0"/>
+                <a:ea typeface="Bodoni Ornaments" pitchFamily="2" charset="0"/>
+              </a:rPr>
+              <a:t>Oh, and I’ve seen</a:t>
+            </a:r>
+          </a:p>
+          <a:p>
+            <a:r>
+              <a:rPr lang="en-US" sz="4000" dirty="0">
+                <a:solidFill>
+                  <a:schemeClr val="bg1"/>
+                </a:solidFill>
+                <a:latin typeface="Avenir Medium" panose="02000503020000020003" pitchFamily="2" charset="0"/>
+                <a:ea typeface="Bodoni Ornaments" pitchFamily="2" charset="0"/>
+              </a:rPr>
+              <a:t>Many searching</a:t>
+            </a:r>
+          </a:p>
+          <a:p>
+            <a:endParaRPr lang="en-US" sz="4000" dirty="0">
+              <a:solidFill>
+                <a:schemeClr val="bg1"/>
+              </a:solidFill>
+              <a:latin typeface="Avenir Medium" panose="02000503020000020003" pitchFamily="2" charset="0"/>
+              <a:ea typeface="Bodoni Ornaments" pitchFamily="2" charset="0"/>
+            </a:endParaRPr>
+          </a:p>
+          <a:p>
+            <a:r>
+              <a:rPr lang="en-US" sz="4000" dirty="0">
                 <a:solidFill>
                   <a:schemeClr val="bg1"/>
                 </a:solidFill>
@@ -4597,7 +4100,7 @@
           </a:p>
           <a:p>
             <a:r>
-              <a:rPr lang="en-US" sz="4400" dirty="0">
+              <a:rPr lang="en-US" sz="4000" dirty="0">
                 <a:solidFill>
                   <a:schemeClr val="bg1"/>
                 </a:solidFill>
@@ -4628,7 +4131,7 @@
     <p:bg>
       <p:bgPr>
         <a:solidFill>
-          <a:schemeClr val="accent1"/>
+          <a:schemeClr val="tx1"/>
         </a:solidFill>
         <a:effectLst/>
       </p:bgPr>
@@ -4671,8 +4174,8 @@
         </p:nvSpPr>
         <p:spPr>
           <a:xfrm>
-            <a:off x="682831" y="497702"/>
-            <a:ext cx="10826338" cy="5862596"/>
+            <a:off x="318655" y="221672"/>
+            <a:ext cx="8492836" cy="6386945"/>
           </a:xfrm>
         </p:spPr>
         <p:txBody>
@@ -4681,43 +4184,7 @@
           </a:bodyPr>
           <a:lstStyle/>
           <a:p>
-            <a:r>
-              <a:rPr lang="en-US" sz="4400" dirty="0">
-                <a:solidFill>
-                  <a:schemeClr val="bg1"/>
-                </a:solidFill>
-                <a:latin typeface="Avenir Medium" panose="02000503020000020003" pitchFamily="2" charset="0"/>
-                <a:ea typeface="Bodoni Ornaments" pitchFamily="2" charset="0"/>
-              </a:rPr>
-              <a:t>But I know </a:t>
-            </a:r>
-          </a:p>
-          <a:p>
-            <a:r>
-              <a:rPr lang="en-US" sz="4400" dirty="0">
-                <a:solidFill>
-                  <a:schemeClr val="bg1"/>
-                </a:solidFill>
-                <a:latin typeface="Avenir Medium" panose="02000503020000020003" pitchFamily="2" charset="0"/>
-                <a:ea typeface="Bodoni Ornaments" pitchFamily="2" charset="0"/>
-              </a:rPr>
-              <a:t>We’re all searching for answers </a:t>
-            </a:r>
-          </a:p>
-          <a:p>
-            <a:r>
-              <a:rPr lang="en-US" sz="4400" dirty="0">
-                <a:solidFill>
-                  <a:schemeClr val="bg1"/>
-                </a:solidFill>
-                <a:latin typeface="Avenir Medium" panose="02000503020000020003" pitchFamily="2" charset="0"/>
-                <a:ea typeface="Bodoni Ornaments" pitchFamily="2" charset="0"/>
-              </a:rPr>
-              <a:t>Only you provide</a:t>
-            </a:r>
-          </a:p>
-          <a:p>
-            <a:endParaRPr lang="en-US" sz="4400" dirty="0">
+            <a:endParaRPr lang="en-US" sz="4000" dirty="0">
               <a:solidFill>
                 <a:schemeClr val="bg1"/>
               </a:solidFill>
@@ -4727,7 +4194,52 @@
           </a:p>
           <a:p>
             <a:r>
-              <a:rPr lang="en-US" sz="4400" dirty="0">
+              <a:rPr lang="en-US" sz="4000" dirty="0">
+                <a:solidFill>
+                  <a:schemeClr val="bg1"/>
+                </a:solidFill>
+                <a:latin typeface="Avenir Medium" panose="02000503020000020003" pitchFamily="2" charset="0"/>
+                <a:ea typeface="Bodoni Ornaments" pitchFamily="2" charset="0"/>
+              </a:rPr>
+              <a:t>But I know </a:t>
+            </a:r>
+          </a:p>
+          <a:p>
+            <a:r>
+              <a:rPr lang="en-US" sz="4000" dirty="0">
+                <a:solidFill>
+                  <a:schemeClr val="bg1"/>
+                </a:solidFill>
+                <a:latin typeface="Avenir Medium" panose="02000503020000020003" pitchFamily="2" charset="0"/>
+                <a:ea typeface="Bodoni Ornaments" pitchFamily="2" charset="0"/>
+              </a:rPr>
+              <a:t>We’re all searching for answers </a:t>
+            </a:r>
+          </a:p>
+          <a:p>
+            <a:r>
+              <a:rPr lang="en-US" sz="4000" dirty="0">
+                <a:solidFill>
+                  <a:schemeClr val="bg1"/>
+                </a:solidFill>
+                <a:latin typeface="Avenir Medium" panose="02000503020000020003" pitchFamily="2" charset="0"/>
+                <a:ea typeface="Bodoni Ornaments" pitchFamily="2" charset="0"/>
+              </a:rPr>
+              <a:t>Only you provide</a:t>
+            </a:r>
+          </a:p>
+          <a:p>
+            <a:endParaRPr lang="en-US" sz="4000" dirty="0">
+              <a:solidFill>
+                <a:schemeClr val="bg1"/>
+              </a:solidFill>
+              <a:latin typeface="Avenir Medium" panose="02000503020000020003" pitchFamily="2" charset="0"/>
+              <a:ea typeface="Bodoni Ornaments" pitchFamily="2" charset="0"/>
+            </a:endParaRPr>
+          </a:p>
+          <a:p>
+            <a:r>
+              <a:rPr lang="en-US" sz="4000" dirty="0">
                 <a:solidFill>
                   <a:schemeClr val="bg1"/>
                 </a:solidFill>
@@ -4739,7 +4251,7 @@
           </a:p>
           <a:p>
             <a:r>
-              <a:rPr lang="en-US" sz="4400" dirty="0">
+              <a:rPr lang="en-US" sz="4000" dirty="0">
                 <a:solidFill>
                   <a:schemeClr val="bg1"/>
                 </a:solidFill>
@@ -4751,7 +4263,7 @@
           </a:p>
           <a:p>
             <a:r>
-              <a:rPr lang="en-US" sz="4400" dirty="0">
+              <a:rPr lang="en-US" sz="4000" dirty="0">
                 <a:solidFill>
                   <a:schemeClr val="bg1"/>
                 </a:solidFill>
@@ -4782,9 +4294,7 @@
     <p:bg>
       <p:bgPr>
         <a:solidFill>
-          <a:schemeClr val="accent5">
-            <a:lumMod val="50000"/>
-          </a:schemeClr>
+          <a:schemeClr val="tx1"/>
         </a:solidFill>
         <a:effectLst/>
       </p:bgPr>
@@ -4794,7 +4304,7 @@
         <p:cNvPr id="1" name="">
           <a:extLst>
             <a:ext uri="{FF2B5EF4-FFF2-40B4-BE49-F238E27FC236}">
-              <a16:creationId xmlns:a16="http://schemas.microsoft.com/office/drawing/2014/main" id="{3783DE1C-1798-B848-FD3A-DD0C30214ACB}"/>
+              <a16:creationId xmlns:a16="http://schemas.microsoft.com/office/drawing/2014/main" id="{2C017B06-5C2E-571B-159C-9658D12A6BF0}"/>
             </a:ext>
           </a:extLst>
         </p:cNvPr>
@@ -4814,7 +4324,7 @@
           <p:cNvPr id="3" name="Subtitle 2">
             <a:extLst>
               <a:ext uri="{FF2B5EF4-FFF2-40B4-BE49-F238E27FC236}">
-                <a16:creationId xmlns:a16="http://schemas.microsoft.com/office/drawing/2014/main" id="{A2BD15F2-695B-6197-C236-824F76F4918B}"/>
+                <a16:creationId xmlns:a16="http://schemas.microsoft.com/office/drawing/2014/main" id="{F2876DA7-31DE-D6BC-66FE-01A30CAAADC8}"/>
               </a:ext>
             </a:extLst>
           </p:cNvPr>
@@ -4827,8 +4337,8 @@
         </p:nvSpPr>
         <p:spPr>
           <a:xfrm>
-            <a:off x="682831" y="497702"/>
-            <a:ext cx="10826338" cy="5862596"/>
+            <a:off x="290945" y="235527"/>
+            <a:ext cx="8575964" cy="6359237"/>
           </a:xfrm>
         </p:spPr>
         <p:txBody>
@@ -4837,7 +4347,7 @@
           </a:bodyPr>
           <a:lstStyle/>
           <a:p>
-            <a:endParaRPr lang="en-US" sz="4400" dirty="0">
+            <a:endParaRPr lang="en-US" sz="4000" dirty="0">
               <a:solidFill>
                 <a:schemeClr val="bg1"/>
               </a:solidFill>
@@ -4847,7 +4357,7 @@
           </a:p>
           <a:p>
             <a:r>
-              <a:rPr lang="en-US" sz="4400" dirty="0">
+              <a:rPr lang="en-US" sz="4000" dirty="0">
                 <a:solidFill>
                   <a:schemeClr val="bg1"/>
                 </a:solidFill>
@@ -4859,7 +4369,7 @@
           </a:p>
           <a:p>
             <a:r>
-              <a:rPr lang="en-US" sz="4400" dirty="0">
+              <a:rPr lang="en-US" sz="4000" dirty="0">
                 <a:solidFill>
                   <a:schemeClr val="bg1"/>
                 </a:solidFill>
@@ -4870,7 +4380,7 @@
             </a:r>
           </a:p>
           <a:p>
-            <a:endParaRPr lang="en-US" sz="4400" dirty="0">
+            <a:endParaRPr lang="en-US" sz="4000" dirty="0">
               <a:solidFill>
                 <a:schemeClr val="bg1"/>
               </a:solidFill>
@@ -4880,7 +4390,7 @@
           </a:p>
           <a:p>
             <a:r>
-              <a:rPr lang="en-US" sz="4400" dirty="0">
+              <a:rPr lang="en-US" sz="4000" dirty="0">
                 <a:solidFill>
                   <a:schemeClr val="bg1"/>
                 </a:solidFill>
@@ -4892,7 +4402,7 @@
           </a:p>
           <a:p>
             <a:r>
-              <a:rPr lang="en-US" sz="4400" dirty="0">
+              <a:rPr lang="en-US" sz="4000" dirty="0">
                 <a:solidFill>
                   <a:schemeClr val="bg1"/>
                 </a:solidFill>
@@ -4903,7 +4413,7 @@
             </a:r>
           </a:p>
           <a:p>
-            <a:endParaRPr lang="en-US" sz="4400" dirty="0">
+            <a:endParaRPr lang="en-US" sz="4000" dirty="0">
               <a:solidFill>
                 <a:schemeClr val="bg1"/>
               </a:solidFill>
@@ -4916,7 +4426,7 @@
     </p:spTree>
     <p:extLst>
       <p:ext uri="{BB962C8B-B14F-4D97-AF65-F5344CB8AC3E}">
-        <p14:creationId xmlns:p14="http://schemas.microsoft.com/office/powerpoint/2010/main" val="3688268374"/>
+        <p14:creationId xmlns:p14="http://schemas.microsoft.com/office/powerpoint/2010/main" val="1406347398"/>
       </p:ext>
     </p:extLst>
   </p:cSld>
@@ -4975,8 +4485,8 @@
         </p:nvSpPr>
         <p:spPr>
           <a:xfrm>
-            <a:off x="682831" y="497702"/>
-            <a:ext cx="10826338" cy="5862596"/>
+            <a:off x="221673" y="249383"/>
+            <a:ext cx="8686800" cy="6331526"/>
           </a:xfrm>
         </p:spPr>
         <p:txBody>
@@ -4985,7 +4495,7 @@
           </a:bodyPr>
           <a:lstStyle/>
           <a:p>
-            <a:endParaRPr lang="en-US" sz="4400" dirty="0">
+            <a:endParaRPr lang="en-US" sz="4000" dirty="0">
               <a:solidFill>
                 <a:schemeClr val="bg1"/>
               </a:solidFill>
@@ -4995,7 +4505,7 @@
           </a:p>
           <a:p>
             <a:r>
-              <a:rPr lang="en-US" sz="4400" dirty="0">
+              <a:rPr lang="en-US" sz="4000" dirty="0">
                 <a:solidFill>
                   <a:schemeClr val="bg1"/>
                 </a:solidFill>
@@ -5007,7 +4517,7 @@
           </a:p>
           <a:p>
             <a:r>
-              <a:rPr lang="en-US" sz="4400" dirty="0">
+              <a:rPr lang="en-US" sz="4000" dirty="0">
                 <a:solidFill>
                   <a:schemeClr val="bg1"/>
                 </a:solidFill>
@@ -5018,7 +4528,7 @@
             </a:r>
           </a:p>
           <a:p>
-            <a:endParaRPr lang="en-US" sz="4400" dirty="0">
+            <a:endParaRPr lang="en-US" sz="4000" dirty="0">
               <a:solidFill>
                 <a:schemeClr val="bg1"/>
               </a:solidFill>
@@ -5028,7 +4538,7 @@
           </a:p>
           <a:p>
             <a:r>
-              <a:rPr lang="en-US" sz="4400" dirty="0">
+              <a:rPr lang="en-US" sz="4000" dirty="0">
                 <a:solidFill>
                   <a:schemeClr val="bg1"/>
                 </a:solidFill>
@@ -5040,7 +4550,7 @@
           </a:p>
           <a:p>
             <a:r>
-              <a:rPr lang="en-US" sz="4400" dirty="0">
+              <a:rPr lang="en-US" sz="4000" dirty="0">
                 <a:solidFill>
                   <a:schemeClr val="bg1"/>
                 </a:solidFill>
@@ -5051,7 +4561,7 @@
             </a:r>
           </a:p>
           <a:p>
-            <a:endParaRPr lang="en-US" sz="4400" dirty="0">
+            <a:endParaRPr lang="en-US" sz="4000" dirty="0">
               <a:solidFill>
                 <a:schemeClr val="bg1"/>
               </a:solidFill>
@@ -5061,7 +4571,7 @@
           </a:p>
           <a:p>
             <a:r>
-              <a:rPr lang="en-US" sz="4400" dirty="0">
+              <a:rPr lang="en-US" sz="4000" dirty="0">
                 <a:solidFill>
                   <a:schemeClr val="bg1"/>
                 </a:solidFill>
@@ -5092,7 +4602,7 @@
     <p:bg>
       <p:bgPr>
         <a:solidFill>
-          <a:schemeClr val="accent1"/>
+          <a:schemeClr val="tx1"/>
         </a:solidFill>
         <a:effectLst/>
       </p:bgPr>
@@ -5135,8 +4645,8 @@
         </p:nvSpPr>
         <p:spPr>
           <a:xfrm>
-            <a:off x="682831" y="497702"/>
-            <a:ext cx="10826338" cy="5862596"/>
+            <a:off x="249382" y="290945"/>
+            <a:ext cx="8589818" cy="6359237"/>
           </a:xfrm>
         </p:spPr>
         <p:txBody>
@@ -5145,7 +4655,7 @@
           </a:bodyPr>
           <a:lstStyle/>
           <a:p>
-            <a:endParaRPr lang="en-US" sz="4400" dirty="0">
+            <a:endParaRPr lang="en-US" sz="4000" dirty="0">
               <a:solidFill>
                 <a:schemeClr val="bg1"/>
               </a:solidFill>
@@ -5155,7 +4665,7 @@
           </a:p>
           <a:p>
             <a:r>
-              <a:rPr lang="en-US" sz="4400" dirty="0">
+              <a:rPr lang="en-US" sz="4000" dirty="0">
                 <a:solidFill>
                   <a:schemeClr val="bg1"/>
                 </a:solidFill>
@@ -5167,7 +4677,7 @@
           </a:p>
           <a:p>
             <a:r>
-              <a:rPr lang="en-US" sz="4400" dirty="0">
+              <a:rPr lang="en-US" sz="4000" dirty="0">
                 <a:solidFill>
                   <a:schemeClr val="bg1"/>
                 </a:solidFill>
@@ -5178,7 +4688,7 @@
             </a:r>
           </a:p>
           <a:p>
-            <a:endParaRPr lang="en-US" sz="4400" dirty="0">
+            <a:endParaRPr lang="en-US" sz="4000" dirty="0">
               <a:solidFill>
                 <a:schemeClr val="bg1"/>
               </a:solidFill>
@@ -5188,7 +4698,7 @@
           </a:p>
           <a:p>
             <a:r>
-              <a:rPr lang="en-US" sz="4400" dirty="0">
+              <a:rPr lang="en-US" sz="4000" dirty="0">
                 <a:solidFill>
                   <a:schemeClr val="bg1"/>
                 </a:solidFill>
@@ -5200,7 +4710,7 @@
           </a:p>
           <a:p>
             <a:r>
-              <a:rPr lang="en-US" sz="4400" dirty="0">
+              <a:rPr lang="en-US" sz="4000" dirty="0">
                 <a:solidFill>
                   <a:schemeClr val="bg1"/>
                 </a:solidFill>
@@ -5211,7 +4721,7 @@
             </a:r>
           </a:p>
           <a:p>
-            <a:endParaRPr lang="en-US" sz="4400" dirty="0">
+            <a:endParaRPr lang="en-US" sz="4000" dirty="0">
               <a:solidFill>
                 <a:schemeClr val="bg1"/>
               </a:solidFill>
@@ -5237,7 +4747,7 @@
 <file path=ppt/theme/theme1.xml><?xml version="1.0" encoding="utf-8"?>
 <a:theme xmlns:a="http://schemas.openxmlformats.org/drawingml/2006/main" name="Office Theme">
   <a:themeElements>
-    <a:clrScheme name="Office">
+    <a:clrScheme name="Office Theme">
       <a:dk1>
         <a:sysClr val="windowText" lastClr="000000"/>
       </a:dk1>
@@ -5275,7 +4785,7 @@
         <a:srgbClr val="96607D"/>
       </a:folHlink>
     </a:clrScheme>
-    <a:fontScheme name="Office">
+    <a:fontScheme name="Office Theme">
       <a:majorFont>
         <a:latin typeface="Aptos Display" panose="02110004020202020204"/>
         <a:ea typeface=""/>
@@ -5381,7 +4891,7 @@
         <a:font script="Tfng" typeface="Ebrima"/>
       </a:minorFont>
     </a:fontScheme>
-    <a:fmtScheme name="Office">
+    <a:fmtScheme name="Office Theme">
       <a:fillStyleLst>
         <a:solidFill>
           <a:schemeClr val="phClr"/>

--- a/Good Good Father.pptx
+++ b/Good Good Father.pptx
@@ -254,7 +254,7 @@
           <a:p>
             <a:fld id="{E759A0DE-F190-5444-87AC-4719D5F20D15}" type="datetimeFigureOut">
               <a:rPr lang="en-US" smtClean="0"/>
-              <a:t>6/13/26</a:t>
+              <a:t>8/22/26</a:t>
             </a:fld>
             <a:endParaRPr lang="en-US"/>
           </a:p>
@@ -424,7 +424,7 @@
           <a:p>
             <a:fld id="{E759A0DE-F190-5444-87AC-4719D5F20D15}" type="datetimeFigureOut">
               <a:rPr lang="en-US" smtClean="0"/>
-              <a:t>6/13/26</a:t>
+              <a:t>8/22/26</a:t>
             </a:fld>
             <a:endParaRPr lang="en-US"/>
           </a:p>
@@ -604,7 +604,7 @@
           <a:p>
             <a:fld id="{E759A0DE-F190-5444-87AC-4719D5F20D15}" type="datetimeFigureOut">
               <a:rPr lang="en-US" smtClean="0"/>
-              <a:t>6/13/26</a:t>
+              <a:t>8/22/26</a:t>
             </a:fld>
             <a:endParaRPr lang="en-US"/>
           </a:p>
@@ -774,7 +774,7 @@
           <a:p>
             <a:fld id="{E759A0DE-F190-5444-87AC-4719D5F20D15}" type="datetimeFigureOut">
               <a:rPr lang="en-US" smtClean="0"/>
-              <a:t>6/13/26</a:t>
+              <a:t>8/22/26</a:t>
             </a:fld>
             <a:endParaRPr lang="en-US"/>
           </a:p>
@@ -1020,7 +1020,7 @@
           <a:p>
             <a:fld id="{E759A0DE-F190-5444-87AC-4719D5F20D15}" type="datetimeFigureOut">
               <a:rPr lang="en-US" smtClean="0"/>
-              <a:t>6/13/26</a:t>
+              <a:t>8/22/26</a:t>
             </a:fld>
             <a:endParaRPr lang="en-US"/>
           </a:p>
@@ -1252,7 +1252,7 @@
           <a:p>
             <a:fld id="{E759A0DE-F190-5444-87AC-4719D5F20D15}" type="datetimeFigureOut">
               <a:rPr lang="en-US" smtClean="0"/>
-              <a:t>6/13/26</a:t>
+              <a:t>8/22/26</a:t>
             </a:fld>
             <a:endParaRPr lang="en-US"/>
           </a:p>
@@ -1619,7 +1619,7 @@
           <a:p>
             <a:fld id="{E759A0DE-F190-5444-87AC-4719D5F20D15}" type="datetimeFigureOut">
               <a:rPr lang="en-US" smtClean="0"/>
-              <a:t>6/13/26</a:t>
+              <a:t>8/22/26</a:t>
             </a:fld>
             <a:endParaRPr lang="en-US"/>
           </a:p>
@@ -1737,7 +1737,7 @@
           <a:p>
             <a:fld id="{E759A0DE-F190-5444-87AC-4719D5F20D15}" type="datetimeFigureOut">
               <a:rPr lang="en-US" smtClean="0"/>
-              <a:t>6/13/26</a:t>
+              <a:t>8/22/26</a:t>
             </a:fld>
             <a:endParaRPr lang="en-US"/>
           </a:p>
@@ -1832,7 +1832,7 @@
           <a:p>
             <a:fld id="{E759A0DE-F190-5444-87AC-4719D5F20D15}" type="datetimeFigureOut">
               <a:rPr lang="en-US" smtClean="0"/>
-              <a:t>6/13/26</a:t>
+              <a:t>8/22/26</a:t>
             </a:fld>
             <a:endParaRPr lang="en-US"/>
           </a:p>
@@ -2109,7 +2109,7 @@
           <a:p>
             <a:fld id="{E759A0DE-F190-5444-87AC-4719D5F20D15}" type="datetimeFigureOut">
               <a:rPr lang="en-US" smtClean="0"/>
-              <a:t>6/13/26</a:t>
+              <a:t>8/22/26</a:t>
             </a:fld>
             <a:endParaRPr lang="en-US"/>
           </a:p>
@@ -2366,7 +2366,7 @@
           <a:p>
             <a:fld id="{E759A0DE-F190-5444-87AC-4719D5F20D15}" type="datetimeFigureOut">
               <a:rPr lang="en-US" smtClean="0"/>
-              <a:t>6/13/26</a:t>
+              <a:t>8/22/26</a:t>
             </a:fld>
             <a:endParaRPr lang="en-US"/>
           </a:p>
@@ -2579,7 +2579,7 @@
           <a:p>
             <a:fld id="{E759A0DE-F190-5444-87AC-4719D5F20D15}" type="datetimeFigureOut">
               <a:rPr lang="en-US" smtClean="0"/>
-              <a:t>6/13/26</a:t>
+              <a:t>8/22/26</a:t>
             </a:fld>
             <a:endParaRPr lang="en-US"/>
           </a:p>
@@ -3040,6 +3040,84 @@
           </a:p>
         </p:txBody>
       </p:sp>
+      <p:sp>
+        <p:nvSpPr>
+          <p:cNvPr id="2" name="TextBox 1">
+            <a:extLst>
+              <a:ext uri="{FF2B5EF4-FFF2-40B4-BE49-F238E27FC236}">
+                <a16:creationId xmlns:a16="http://schemas.microsoft.com/office/drawing/2014/main" id="{1950585B-F576-64A6-524D-716D54A25052}"/>
+              </a:ext>
+            </a:extLst>
+          </p:cNvPr>
+          <p:cNvSpPr txBox="1"/>
+          <p:nvPr/>
+        </p:nvSpPr>
+        <p:spPr>
+          <a:xfrm>
+            <a:off x="168442" y="5444311"/>
+            <a:ext cx="8807115" cy="1200329"/>
+          </a:xfrm>
+          <a:prstGeom prst="rect">
+            <a:avLst/>
+          </a:prstGeom>
+          <a:noFill/>
+        </p:spPr>
+        <p:txBody>
+          <a:bodyPr wrap="square" rtlCol="0">
+            <a:spAutoFit/>
+          </a:bodyPr>
+          <a:lstStyle/>
+          <a:p>
+            <a:pPr algn="ctr"/>
+            <a:r>
+              <a:rPr lang="en-US" dirty="0">
+                <a:solidFill>
+                  <a:schemeClr val="bg1"/>
+                </a:solidFill>
+              </a:rPr>
+              <a:t>Words &amp; Music by Pat Barrett and Anthony Brown (2014)</a:t>
+            </a:r>
+          </a:p>
+          <a:p>
+            <a:pPr algn="ctr"/>
+            <a:r>
+              <a:rPr lang="en-US" dirty="0">
+                <a:solidFill>
+                  <a:schemeClr val="bg1"/>
+                </a:solidFill>
+              </a:rPr>
+              <a:t>© 2014 by Capital CMG Paragon, Common Hymnal Publishing, Housefires Sounds, </a:t>
+            </a:r>
+            <a:r>
+              <a:rPr lang="en-US" dirty="0" err="1">
+                <a:solidFill>
+                  <a:schemeClr val="bg1"/>
+                </a:solidFill>
+              </a:rPr>
+              <a:t>sixsteps</a:t>
+            </a:r>
+            <a:r>
+              <a:rPr lang="en-US" dirty="0">
+                <a:solidFill>
+                  <a:schemeClr val="bg1"/>
+                </a:solidFill>
+              </a:rPr>
+              <a:t> Music</a:t>
+            </a:r>
+          </a:p>
+          <a:p>
+            <a:pPr algn="ctr"/>
+            <a:r>
+              <a:rPr lang="en-US" dirty="0">
+                <a:solidFill>
+                  <a:schemeClr val="bg1"/>
+                </a:solidFill>
+              </a:rPr>
+              <a:t>CCLI License #137776</a:t>
+            </a:r>
+          </a:p>
+        </p:txBody>
+      </p:sp>
     </p:spTree>
     <p:extLst>
       <p:ext uri="{BB962C8B-B14F-4D97-AF65-F5344CB8AC3E}">
@@ -3472,45 +3550,6 @@
               <a:latin typeface="Avenir Medium" panose="02000503020000020003" pitchFamily="2" charset="0"/>
               <a:ea typeface="Bodoni Ornaments" pitchFamily="2" charset="0"/>
             </a:endParaRPr>
-          </a:p>
-        </p:txBody>
-      </p:sp>
-      <p:sp>
-        <p:nvSpPr>
-          <p:cNvPr id="2" name="TextBox 1">
-            <a:extLst>
-              <a:ext uri="{FF2B5EF4-FFF2-40B4-BE49-F238E27FC236}">
-                <a16:creationId xmlns:a16="http://schemas.microsoft.com/office/drawing/2014/main" id="{416213ED-94A8-BC54-1DEE-F74ECC714D7D}"/>
-              </a:ext>
-            </a:extLst>
-          </p:cNvPr>
-          <p:cNvSpPr txBox="1"/>
-          <p:nvPr/>
-        </p:nvSpPr>
-        <p:spPr>
-          <a:xfrm>
-            <a:off x="7390614" y="6488668"/>
-            <a:ext cx="1753386" cy="369332"/>
-          </a:xfrm>
-          <a:prstGeom prst="rect">
-            <a:avLst/>
-          </a:prstGeom>
-          <a:noFill/>
-        </p:spPr>
-        <p:txBody>
-          <a:bodyPr wrap="square" rtlCol="0">
-            <a:spAutoFit/>
-          </a:bodyPr>
-          <a:lstStyle/>
-          <a:p>
-            <a:r>
-              <a:rPr lang="en-US" dirty="0">
-                <a:solidFill>
-                  <a:schemeClr val="bg1"/>
-                </a:solidFill>
-              </a:rPr>
-              <a:t>CCLI#7102397</a:t>
-            </a:r>
           </a:p>
         </p:txBody>
       </p:sp>
